--- a/Curriculo/Fase3_Basico2/decks/Basico2_S05_Jay.pptx
+++ b/Curriculo/Fase3_Basico2/decks/Basico2_S05_Jay.pptx
@@ -134,7 +134,7 @@
   <p:extLst>
     <p:ext uri="{521415D9-36F7-43E2-AB2F-B90AF26B5E84}">
       <p14:sectionLst xmlns:p14="http://schemas.microsoft.com/office/powerpoint/2010/main">
-        <p14:section name="Semana 5" id="{96E97519-A887-E267-F100-B713D1F4F471}">
+        <p14:section name="Semana 5" id="{7E0E0128-3014-1CAE-AB02-0E028560F193}">
           <p14:sldIdLst>
             <p14:sldId id="256"/>
             <p14:sldId id="257"/>
@@ -200,7 +200,7 @@
     </p:spTree>
     <p:extLst>
       <p:ext uri="{BB962C8B-B14F-4D97-AF65-F5344CB8AC3E}">
-        <p14:creationId xmlns:p14="http://schemas.microsoft.com/office/powerpoint/2010/main" val="4145184598"/>
+        <p14:creationId xmlns:p14="http://schemas.microsoft.com/office/powerpoint/2010/main" val="1993343724"/>
       </p:ext>
     </p:extLst>
   </p:cSld>
@@ -614,7 +614,7 @@
             <a:r>
               <a:rPr lang="en-US" dirty="0"/>
               <a:t>1 min. Si dices 비행기에 가요, vas hacia el avión, no en avión. El mismo 로 sirve para idiomas: muestras una taza, «이거 한국어로 뭐예요?» → coro → «컵이에요!». «La pregunta más útil del curso: úsenla conmigo cuando quieran.» Si vas atrasado, deja solo 비행기로 frente a 비행기에 (el resto está en la sección 3.3 del material).
-Imagen sugerida: Una taza (para la pregunta 이거 한국어로 뭐예요? — 컵이에요!)
+Imagen: incluida (dibujo de la casa).
 Fuente: Nueva
 Lámina 11</a:t>
             </a:r>
@@ -793,7 +793,7 @@
             <a:r>
               <a:rPr lang="en-US" dirty="0"/>
               <a:t>21:19 · 1 min 30 s. «¿Cuántos días de vacaciones de verano creen que toma un oficinista en Seúl?» Muchos toman solo 3 a 5 días seguidos, a fines de julio o comienzos de agosto: viaje corto e intenso a Jeju, Busan o Japón en un fin de semana largo. A Jeju casi todos van en avión: es una isla y no tiene tren. 따라 하세요: 여름휴가에 제주도에 갈 거예요 (coro, dos veces). Di 'muchos', nunca 'todos'.
-Imagen sugerida: Mapa simple de Corea con Seúl → Jeju (avión) y Seúl → Busan (tren); solo esos 3 lugares, sin romanización; si se quiere, una foto de Jeju o Busan
+Imagen: incluida (dibujo de la casa).
 Fuente: Sesion_10_Futuro_Vacaciones.pptx L7 (solo los 3 destinos, sin romanización)
 Lámina 13</a:t>
             </a:r>
@@ -1328,7 +1328,7 @@
             <a:r>
               <a:rPr lang="en-US" dirty="0"/>
               <a:t>21:00–21:01 · 1 min. Inicia la grabación en la nube desde aquí (Basico2_S05_2026-11-11) y saluda: «안녕하세요, 여러분!». En Chile es miércoles 11, pero en Corea ya es jueves 12 a las 9:00: el 11/11 fue ayer. 따라 하세요: «빼빼로데이였어요» (coro). En 30 s: galletita en forma de palito, 11/11 parecen cuatro palitos, fecha comercial popular desde los años 90, no fiesta tradicional; y fíjense en 였어요, el pasado de la semana pasada, último viaje al pasado antes del quiz 4.
-Imagen sugerida: Foto genérica de una caja de palitos de chocolate con '11/11', sin logos de marca (propia o con licencia libre); en la frase, 였어요 destacado en azul
+Imagen: incluida (dibujo de la casa).
 Fuente: Nueva
 Lámina 1</a:t>
             </a:r>
@@ -1952,7 +1952,7 @@
             <a:r>
               <a:rPr lang="en-US" dirty="0"/>
               <a:t>1 min 30 s. Compartes 20 s el Lector (Practicar → Palabras; pestaña Progreso). En el Lector, la consigna es decir cada palabra en voz alta antes de tocar (las opciones traen letras latinas). Cuatro: anoten 3 cosas que saben hacer, 3 que no y piensen en una invitación que tendrían que rechazar: «la semana que viene aprendemos a decir que no, con estilo». La clase 6 empieza con el quiz 5: 갈 거예요, 먹을 거예요, 살 거예요 y 로.
-Imagen sugerida: Captura del Lector en Practicar → Palabras, con la línea de corrección tapada (trae romanización)
+Imagen: incluida (dibujo de la casa).
 Fuente: Nueva
 Lámina 24</a:t>
             </a:r>
@@ -2042,7 +2042,6 @@
             <a:r>
               <a:rPr lang="en-US" dirty="0"/>
               <a:t>15 s. «잘했어요, 여러분! 다음 주에 봐요! 화이팅!» → grupo: «감사합니다!». A las 22:00 en punto: 'Finalizar reunión para todos', vaya donde vaya la clase.
-Imagen sugerida: Logo azul de Academia Seúl (plantilla)
 Fuente: Plantilla
 Lámina 25</a:t>
             </a:r>
@@ -2132,7 +2131,7 @@
             <a:r>
               <a:rPr lang="en-US" dirty="0"/>
               <a:t>Solo si sobran 2–4 minutos en la sala principal. Piensas un destino y el grupo pregunta solo con preguntas de 네/아니요; quien adivina piensa el siguiente. Otras opciones de emergencia: leer la escena 2 del diálogo con dos voluntarios, o dictar en el chat las 3 frases clave (gana un «잘했어요!» quien las escribe primero con el espacio en 갈 거예요).
-Imagen sugerida: 4 fotos de destinos sin nombre: Seúl, Busan, Jeju y Tokio (licencia libre)
+Imagen: incluida (dibujo de la casa).
 Fuente: Nueva
 Lámina Extra</a:t>
             </a:r>
@@ -2489,7 +2488,7 @@
             <a:r>
               <a:rPr lang="en-US" dirty="0"/>
               <a:t>21:05–21:08 · 1 min 30 s de plan + 1 min de chequeo. Dilo dos veces, despacio y con gestos (calendario, mano-avión, mano-tren, cámara, dos dedos para 'una o la otra'); las frases aparecen una por una y al final 거예요 queda resaltado en azul en todas. Adáptalas a tu plan real sin salir de la lista. Chequeo en coro: «제가 버스로 부산에 갈 거예요?» → «아니요! 기차로!» → «네, 기차로 갈 거예요. 잘했어요!» · «제가 내년 일월에 한국에 갈 거예요?» → «네!» · «부산에서 영화를 볼 거예요?» → «아니요! 사진!». Cierra: «¿Qué palabra se repitió en todas las frases? 거예요: eso es el futuro.»
-Imagen sugerida: Foto real de Jay para su plan (Busan, un tren, Jeju o su plan verdadero)
+Imagen: incluida (dibujo de la casa).
 Fuente: Nueva (foto de Jay)
 Lámina 5</a:t>
             </a:r>
@@ -3996,7 +3995,7 @@
         <p:spPr>
           <a:xfrm>
             <a:off x="548640" y="1325880"/>
-            <a:ext cx="11064240" cy="457200"/>
+            <a:ext cx="11091672" cy="457200"/>
           </a:xfrm>
           <a:prstGeom prst="rect">
             <a:avLst/>
@@ -4105,8 +4104,8 @@
         </p:blipFill>
         <p:spPr>
           <a:xfrm>
-            <a:off x="1422121" y="1984248"/>
-            <a:ext cx="854507" cy="854507"/>
+            <a:off x="1361084" y="1984248"/>
+            <a:ext cx="976579" cy="976579"/>
           </a:xfrm>
           <a:prstGeom prst="rect">
             <a:avLst/>
@@ -4121,8 +4120,8 @@
         </p:nvSpPr>
         <p:spPr>
           <a:xfrm>
-            <a:off x="548640" y="2857043"/>
-            <a:ext cx="2601468" cy="447599"/>
+            <a:off x="548640" y="2979115"/>
+            <a:ext cx="2601468" cy="406908"/>
           </a:xfrm>
           <a:prstGeom prst="rect">
             <a:avLst/>
@@ -4140,7 +4139,7 @@
               <a:buNone/>
             </a:pPr>
             <a:r>
-              <a:rPr lang="ko-KR" altLang="en-US" sz="2800" b="1" dirty="0">
+              <a:rPr lang="ko-KR" altLang="en-US" sz="2100" b="1" dirty="0">
                 <a:solidFill>
                   <a:srgbClr val="4236F6"/>
                 </a:solidFill>
@@ -4150,7 +4149,7 @@
               </a:rPr>
               <a:t>쉬다</a:t>
             </a:r>
-            <a:endParaRPr lang="en-US" sz="2800" dirty="0"/>
+            <a:endParaRPr lang="en-US" sz="2100" dirty="0"/>
           </a:p>
         </p:txBody>
       </p:sp>
@@ -4162,8 +4161,8 @@
         </p:nvSpPr>
         <p:spPr>
           <a:xfrm>
-            <a:off x="621792" y="3304642"/>
-            <a:ext cx="2455164" cy="274320"/>
+            <a:off x="621792" y="3386023"/>
+            <a:ext cx="2455164" cy="449885"/>
           </a:xfrm>
           <a:prstGeom prst="rect">
             <a:avLst/>
@@ -4217,8 +4216,8 @@
         </p:blipFill>
         <p:spPr>
           <a:xfrm>
-            <a:off x="2711196" y="3488436"/>
-            <a:ext cx="329184" cy="329184"/>
+            <a:off x="2747772" y="1947672"/>
+            <a:ext cx="310896" cy="310896"/>
           </a:xfrm>
           <a:prstGeom prst="rect">
             <a:avLst/>
@@ -4286,7 +4285,7 @@
               <a:buNone/>
             </a:pPr>
             <a:r>
-              <a:rPr lang="ko-KR" altLang="en-US" sz="2700" b="1" dirty="0">
+              <a:rPr lang="ko-KR" altLang="en-US" sz="2100" b="1" dirty="0">
                 <a:solidFill>
                   <a:srgbClr val="4236F6"/>
                 </a:solidFill>
@@ -4296,7 +4295,7 @@
               </a:rPr>
               <a:t>친구를 만나다</a:t>
             </a:r>
-            <a:endParaRPr lang="en-US" sz="2700" dirty="0"/>
+            <a:endParaRPr lang="en-US" sz="2100" dirty="0"/>
           </a:p>
         </p:txBody>
       </p:sp>
@@ -4309,7 +4308,7 @@
         <p:spPr>
           <a:xfrm>
             <a:off x="3451860" y="2920136"/>
-            <a:ext cx="2455164" cy="577444"/>
+            <a:ext cx="2455164" cy="915772"/>
           </a:xfrm>
           <a:prstGeom prst="rect">
             <a:avLst/>
@@ -4399,7 +4398,7 @@
               <a:buNone/>
             </a:pPr>
             <a:r>
-              <a:rPr lang="ko-KR" altLang="en-US" sz="3200" b="1" dirty="0">
+              <a:rPr lang="ko-KR" altLang="en-US" sz="2100" b="1" dirty="0">
                 <a:solidFill>
                   <a:srgbClr val="4236F6"/>
                 </a:solidFill>
@@ -4409,7 +4408,7 @@
               </a:rPr>
               <a:t>영화를 보다</a:t>
             </a:r>
-            <a:endParaRPr lang="en-US" sz="3200" dirty="0"/>
+            <a:endParaRPr lang="en-US" sz="2100" dirty="0"/>
           </a:p>
         </p:txBody>
       </p:sp>
@@ -4422,7 +4421,7 @@
         <p:spPr>
           <a:xfrm>
             <a:off x="6281928" y="2920136"/>
-            <a:ext cx="2455164" cy="577444"/>
+            <a:ext cx="2455164" cy="915772"/>
           </a:xfrm>
           <a:prstGeom prst="rect">
             <a:avLst/>
@@ -4476,8 +4475,8 @@
         </p:blipFill>
         <p:spPr>
           <a:xfrm>
-            <a:off x="8371332" y="3488436"/>
-            <a:ext cx="329184" cy="329184"/>
+            <a:off x="8407908" y="1947672"/>
+            <a:ext cx="310896" cy="310896"/>
           </a:xfrm>
           <a:prstGeom prst="rect">
             <a:avLst/>
@@ -4534,8 +4533,8 @@
         </p:blipFill>
         <p:spPr>
           <a:xfrm>
-            <a:off x="9912325" y="1984248"/>
-            <a:ext cx="854507" cy="854507"/>
+            <a:off x="9851288" y="1984248"/>
+            <a:ext cx="976579" cy="976579"/>
           </a:xfrm>
           <a:prstGeom prst="rect">
             <a:avLst/>
@@ -4550,8 +4549,8 @@
         </p:nvSpPr>
         <p:spPr>
           <a:xfrm>
-            <a:off x="9038844" y="2857043"/>
-            <a:ext cx="2601468" cy="447599"/>
+            <a:off x="9038844" y="2979115"/>
+            <a:ext cx="2601468" cy="406908"/>
           </a:xfrm>
           <a:prstGeom prst="rect">
             <a:avLst/>
@@ -4569,7 +4568,7 @@
               <a:buNone/>
             </a:pPr>
             <a:r>
-              <a:rPr lang="ko-KR" altLang="en-US" sz="2800" b="1" dirty="0">
+              <a:rPr lang="ko-KR" altLang="en-US" sz="2100" b="1" dirty="0">
                 <a:solidFill>
                   <a:srgbClr val="4236F6"/>
                 </a:solidFill>
@@ -4579,7 +4578,7 @@
               </a:rPr>
               <a:t>운동하다</a:t>
             </a:r>
-            <a:endParaRPr lang="en-US" sz="2800" dirty="0"/>
+            <a:endParaRPr lang="en-US" sz="2100" dirty="0"/>
           </a:p>
         </p:txBody>
       </p:sp>
@@ -4591,8 +4590,8 @@
         </p:nvSpPr>
         <p:spPr>
           <a:xfrm>
-            <a:off x="9111996" y="3304642"/>
-            <a:ext cx="2455164" cy="274320"/>
+            <a:off x="9111996" y="3386023"/>
+            <a:ext cx="2455164" cy="449885"/>
           </a:xfrm>
           <a:prstGeom prst="rect">
             <a:avLst/>
@@ -4646,8 +4645,8 @@
         </p:blipFill>
         <p:spPr>
           <a:xfrm>
-            <a:off x="11201400" y="3488436"/>
-            <a:ext cx="329184" cy="329184"/>
+            <a:off x="11237976" y="1947672"/>
+            <a:ext cx="310896" cy="310896"/>
           </a:xfrm>
           <a:prstGeom prst="rect">
             <a:avLst/>
@@ -4704,8 +4703,8 @@
         </p:blipFill>
         <p:spPr>
           <a:xfrm>
-            <a:off x="1422121" y="4247388"/>
-            <a:ext cx="854507" cy="854507"/>
+            <a:off x="1361084" y="4247388"/>
+            <a:ext cx="976579" cy="976579"/>
           </a:xfrm>
           <a:prstGeom prst="rect">
             <a:avLst/>
@@ -4720,8 +4719,8 @@
         </p:nvSpPr>
         <p:spPr>
           <a:xfrm>
-            <a:off x="548640" y="5120183"/>
-            <a:ext cx="2601468" cy="447599"/>
+            <a:off x="548640" y="5242255"/>
+            <a:ext cx="2601468" cy="406908"/>
           </a:xfrm>
           <a:prstGeom prst="rect">
             <a:avLst/>
@@ -4739,7 +4738,7 @@
               <a:buNone/>
             </a:pPr>
             <a:r>
-              <a:rPr lang="ko-KR" altLang="en-US" sz="2800" b="1" dirty="0">
+              <a:rPr lang="ko-KR" altLang="en-US" sz="2100" b="1" dirty="0">
                 <a:solidFill>
                   <a:srgbClr val="4236F6"/>
                 </a:solidFill>
@@ -4749,7 +4748,7 @@
               </a:rPr>
               <a:t>요리하다</a:t>
             </a:r>
-            <a:endParaRPr lang="en-US" sz="2800" dirty="0"/>
+            <a:endParaRPr lang="en-US" sz="2100" dirty="0"/>
           </a:p>
         </p:txBody>
       </p:sp>
@@ -4761,8 +4760,8 @@
         </p:nvSpPr>
         <p:spPr>
           <a:xfrm>
-            <a:off x="621792" y="5567782"/>
-            <a:ext cx="2455164" cy="274320"/>
+            <a:off x="621792" y="5649163"/>
+            <a:ext cx="2455164" cy="449885"/>
           </a:xfrm>
           <a:prstGeom prst="rect">
             <a:avLst/>
@@ -4816,8 +4815,8 @@
         </p:blipFill>
         <p:spPr>
           <a:xfrm>
-            <a:off x="2711196" y="5751576"/>
-            <a:ext cx="329184" cy="329184"/>
+            <a:off x="2747772" y="4210812"/>
+            <a:ext cx="310896" cy="310896"/>
           </a:xfrm>
           <a:prstGeom prst="rect">
             <a:avLst/>
@@ -4885,7 +4884,7 @@
               <a:buNone/>
             </a:pPr>
             <a:r>
-              <a:rPr lang="ko-KR" altLang="en-US" sz="2100" b="1" dirty="0">
+              <a:rPr lang="ko-KR" altLang="en-US" sz="2000" b="1" dirty="0">
                 <a:solidFill>
                   <a:srgbClr val="4236F6"/>
                 </a:solidFill>
@@ -4893,26 +4892,9 @@
                 <a:ea typeface="Malgun Gothic" pitchFamily="34" charset="-122"/>
                 <a:cs typeface="Malgun Gothic" pitchFamily="34" charset="-120"/>
               </a:rPr>
-              <a:t>한국어를</a:t>
-            </a:r>
-            <a:endParaRPr lang="en-US" sz="2100" dirty="0"/>
-          </a:p>
-          <a:p>
-            <a:pPr marL="0" indent="0" algn="ctr" eaLnBrk="1">
-              <a:buNone/>
-            </a:pPr>
-            <a:r>
-              <a:rPr lang="ko-KR" altLang="en-US" sz="2100" b="1" dirty="0">
-                <a:solidFill>
-                  <a:srgbClr val="4236F6"/>
-                </a:solidFill>
-                <a:latin typeface="Malgun Gothic" pitchFamily="34" charset="0"/>
-                <a:ea typeface="Malgun Gothic" pitchFamily="34" charset="-122"/>
-                <a:cs typeface="Malgun Gothic" pitchFamily="34" charset="-120"/>
-              </a:rPr>
-              <a:t>공부하다</a:t>
-            </a:r>
-            <a:endParaRPr lang="en-US" sz="2100" dirty="0"/>
+              <a:t>한국어를 공부하다</a:t>
+            </a:r>
+            <a:endParaRPr lang="en-US" sz="2000" dirty="0"/>
           </a:p>
         </p:txBody>
       </p:sp>
@@ -4925,7 +4907,7 @@
         <p:spPr>
           <a:xfrm>
             <a:off x="3451860" y="5183276"/>
-            <a:ext cx="2455164" cy="577444"/>
+            <a:ext cx="2455164" cy="915772"/>
           </a:xfrm>
           <a:prstGeom prst="rect">
             <a:avLst/>
@@ -5004,8 +4986,8 @@
         </p:blipFill>
         <p:spPr>
           <a:xfrm>
-            <a:off x="7082257" y="4247388"/>
-            <a:ext cx="854507" cy="854507"/>
+            <a:off x="7021220" y="4247388"/>
+            <a:ext cx="976579" cy="976579"/>
           </a:xfrm>
           <a:prstGeom prst="rect">
             <a:avLst/>
@@ -5020,8 +5002,8 @@
         </p:nvSpPr>
         <p:spPr>
           <a:xfrm>
-            <a:off x="6208776" y="5120183"/>
-            <a:ext cx="2601468" cy="447599"/>
+            <a:off x="6208776" y="5242255"/>
+            <a:ext cx="2601468" cy="406908"/>
           </a:xfrm>
           <a:prstGeom prst="rect">
             <a:avLst/>
@@ -5039,7 +5021,7 @@
               <a:buNone/>
             </a:pPr>
             <a:r>
-              <a:rPr lang="ko-KR" altLang="en-US" sz="2800" b="1" dirty="0">
+              <a:rPr lang="ko-KR" altLang="en-US" sz="2100" b="1" dirty="0">
                 <a:solidFill>
                   <a:srgbClr val="4236F6"/>
                 </a:solidFill>
@@ -5049,7 +5031,7 @@
               </a:rPr>
               <a:t>일하다</a:t>
             </a:r>
-            <a:endParaRPr lang="en-US" sz="2800" dirty="0"/>
+            <a:endParaRPr lang="en-US" sz="2100" dirty="0"/>
           </a:p>
         </p:txBody>
       </p:sp>
@@ -5061,8 +5043,8 @@
         </p:nvSpPr>
         <p:spPr>
           <a:xfrm>
-            <a:off x="6281928" y="5567782"/>
-            <a:ext cx="2455164" cy="274320"/>
+            <a:off x="6281928" y="5649163"/>
+            <a:ext cx="2455164" cy="449885"/>
           </a:xfrm>
           <a:prstGeom prst="rect">
             <a:avLst/>
@@ -5116,8 +5098,8 @@
         </p:blipFill>
         <p:spPr>
           <a:xfrm>
-            <a:off x="8371332" y="5751576"/>
-            <a:ext cx="329184" cy="329184"/>
+            <a:off x="8407908" y="4210812"/>
+            <a:ext cx="310896" cy="310896"/>
           </a:xfrm>
           <a:prstGeom prst="rect">
             <a:avLst/>
@@ -5185,7 +5167,7 @@
               <a:buNone/>
             </a:pPr>
             <a:r>
-              <a:rPr lang="ko-KR" altLang="en-US" sz="4300" b="1" dirty="0">
+              <a:rPr lang="ko-KR" altLang="en-US" sz="2100" b="1" dirty="0">
                 <a:solidFill>
                   <a:srgbClr val="4236F6"/>
                 </a:solidFill>
@@ -5195,7 +5177,7 @@
               </a:rPr>
               <a:t>놀다</a:t>
             </a:r>
-            <a:endParaRPr lang="en-US" sz="4300" dirty="0"/>
+            <a:endParaRPr lang="en-US" sz="2100" dirty="0"/>
           </a:p>
         </p:txBody>
       </p:sp>
@@ -5208,7 +5190,7 @@
         <p:spPr>
           <a:xfrm>
             <a:off x="9111996" y="5183276"/>
-            <a:ext cx="2455164" cy="577444"/>
+            <a:ext cx="2455164" cy="915772"/>
           </a:xfrm>
           <a:prstGeom prst="rect">
             <a:avLst/>
@@ -5262,8 +5244,8 @@
         </p:blipFill>
         <p:spPr>
           <a:xfrm>
-            <a:off x="11201400" y="5751576"/>
-            <a:ext cx="329184" cy="329184"/>
+            <a:off x="11237976" y="4210812"/>
+            <a:ext cx="310896" cy="310896"/>
           </a:xfrm>
           <a:prstGeom prst="rect">
             <a:avLst/>
@@ -5419,7 +5401,7 @@
         <p:spPr>
           <a:xfrm>
             <a:off x="548640" y="1325880"/>
-            <a:ext cx="11064240" cy="457200"/>
+            <a:ext cx="11091672" cy="457200"/>
           </a:xfrm>
           <a:prstGeom prst="rect">
             <a:avLst/>
@@ -5619,7 +5601,7 @@
         <p:spPr>
           <a:xfrm>
             <a:off x="621792" y="2920136"/>
-            <a:ext cx="3398520" cy="577444"/>
+            <a:ext cx="3398520" cy="915772"/>
           </a:xfrm>
           <a:prstGeom prst="rect">
             <a:avLst/>
@@ -5732,7 +5714,7 @@
         <p:spPr>
           <a:xfrm>
             <a:off x="4395216" y="2920136"/>
-            <a:ext cx="3398520" cy="577444"/>
+            <a:ext cx="3398520" cy="915772"/>
           </a:xfrm>
           <a:prstGeom prst="rect">
             <a:avLst/>
@@ -5845,7 +5827,7 @@
         <p:spPr>
           <a:xfrm>
             <a:off x="8168640" y="2920136"/>
-            <a:ext cx="3398520" cy="577444"/>
+            <a:ext cx="3398520" cy="915772"/>
           </a:xfrm>
           <a:prstGeom prst="rect">
             <a:avLst/>
@@ -5958,7 +5940,7 @@
         <p:spPr>
           <a:xfrm>
             <a:off x="621792" y="5183276"/>
-            <a:ext cx="3398520" cy="577444"/>
+            <a:ext cx="3398520" cy="915772"/>
           </a:xfrm>
           <a:prstGeom prst="rect">
             <a:avLst/>
@@ -6071,7 +6053,7 @@
         <p:spPr>
           <a:xfrm>
             <a:off x="4395216" y="5183276"/>
-            <a:ext cx="3398520" cy="577444"/>
+            <a:ext cx="3398520" cy="915772"/>
           </a:xfrm>
           <a:prstGeom prst="rect">
             <a:avLst/>
@@ -6263,7 +6245,7 @@
         <p:spPr>
           <a:xfrm>
             <a:off x="8168640" y="5457596"/>
-            <a:ext cx="3398520" cy="303124"/>
+            <a:ext cx="3398520" cy="641452"/>
           </a:xfrm>
           <a:prstGeom prst="rect">
             <a:avLst/>
@@ -6328,8 +6310,8 @@
         </p:blipFill>
         <p:spPr>
           <a:xfrm>
-            <a:off x="11201400" y="5751576"/>
-            <a:ext cx="329184" cy="329184"/>
+            <a:off x="11237976" y="4210812"/>
+            <a:ext cx="310896" cy="310896"/>
           </a:xfrm>
           <a:prstGeom prst="rect">
             <a:avLst/>
@@ -6457,16 +6439,40 @@
           </a:p>
         </p:txBody>
       </p:sp>
-      <p:sp>
-        <p:nvSpPr>
-          <p:cNvPr id="3" name="Text 1"/>
+      <p:pic>
+        <p:nvPicPr>
+          <p:cNvPr id="3" name="imagen" descr="C:\Users\Chingu\AppData\Local\Temp\claude\C--Users-Chingu-Desktop-ACADEMIASEULWEB\d4111e1b-5523-44ea-97b2-b1a1d9545b9e\scratchpad\decks\cache\img_7f465c912135575a.png"/>
+          <p:cNvPicPr>
+            <a:picLocks noChangeAspect="1"/>
+          </p:cNvPicPr>
+          <p:nvPr/>
+        </p:nvPicPr>
+        <p:blipFill>
+          <a:blip r:embed="rId3"/>
+          <a:stretch>
+            <a:fillRect/>
+          </a:stretch>
+        </p:blipFill>
+        <p:spPr>
+          <a:xfrm>
+            <a:off x="7754112" y="1508760"/>
+            <a:ext cx="3886200" cy="4480560"/>
+          </a:xfrm>
+          <a:prstGeom prst="rect">
+            <a:avLst/>
+          </a:prstGeom>
+        </p:spPr>
+      </p:pic>
+      <p:sp>
+        <p:nvSpPr>
+          <p:cNvPr id="4" name="Text 1"/>
           <p:cNvSpPr txBox="1"/>
           <p:nvPr/>
         </p:nvSpPr>
         <p:spPr>
           <a:xfrm>
             <a:off x="548640" y="1325880"/>
-            <a:ext cx="11064240" cy="457200"/>
+            <a:ext cx="6931152" cy="457200"/>
           </a:xfrm>
           <a:prstGeom prst="rect">
             <a:avLst/>
@@ -6504,35 +6510,35 @@
           <p:nvPr>
             <p:extLst>
               <p:ext uri="{D42A27DB-BD31-4B8C-83A1-F6EECF244321}">
-                <p14:modId xmlns:p14="http://schemas.microsoft.com/office/powerpoint/2010/main" val="1825382499"/>
+                <p14:modId xmlns:p14="http://schemas.microsoft.com/office/powerpoint/2010/main" val="3741317530"/>
               </p:ext>
             </p:extLst>
           </p:nvPr>
         </p:nvGraphicFramePr>
         <p:xfrm>
           <a:off x="548640" y="1874520"/>
-          <a:ext cx="11091672" cy="914400"/>
+          <a:ext cx="6931152" cy="914400"/>
         </p:xfrm>
         <a:graphic>
           <a:graphicData uri="http://schemas.openxmlformats.org/drawingml/2006/table">
             <a:tbl>
               <a:tblPr/>
               <a:tblGrid>
-                <a:gridCol w="3697224">
+                <a:gridCol w="2310384">
                   <a:extLst>
                     <a:ext uri="{9D8B030D-6E8A-4147-A177-3AD203B41FA5}">
                       <a16:colId xmlns:a16="http://schemas.microsoft.com/office/drawing/2014/main" val="20000"/>
                     </a:ext>
                   </a:extLst>
                 </a:gridCol>
-                <a:gridCol w="3697224">
+                <a:gridCol w="2310384">
                   <a:extLst>
                     <a:ext uri="{9D8B030D-6E8A-4147-A177-3AD203B41FA5}">
                       <a16:colId xmlns:a16="http://schemas.microsoft.com/office/drawing/2014/main" val="20001"/>
                     </a:ext>
                   </a:extLst>
                 </a:gridCol>
-                <a:gridCol w="3697224">
+                <a:gridCol w="2310384">
                   <a:extLst>
                     <a:ext uri="{9D8B030D-6E8A-4147-A177-3AD203B41FA5}">
                       <a16:colId xmlns:a16="http://schemas.microsoft.com/office/drawing/2014/main" val="20002"/>
@@ -7687,7 +7693,7 @@
         <p:spPr>
           <a:xfrm>
             <a:off x="548640" y="1325880"/>
-            <a:ext cx="11064240" cy="548640"/>
+            <a:ext cx="11091672" cy="548640"/>
           </a:xfrm>
           <a:prstGeom prst="rect">
             <a:avLst/>
@@ -7754,7 +7760,7 @@
         </p:nvSpPr>
         <p:spPr>
           <a:xfrm>
-            <a:off x="548640" y="2171700"/>
+            <a:off x="548640" y="2574950"/>
             <a:ext cx="457200" cy="457200"/>
           </a:xfrm>
           <a:prstGeom prst="ellipse">
@@ -7779,7 +7785,7 @@
         </p:nvSpPr>
         <p:spPr>
           <a:xfrm>
-            <a:off x="548640" y="2171700"/>
+            <a:off x="548640" y="2574950"/>
             <a:ext cx="457200" cy="457200"/>
           </a:xfrm>
           <a:prstGeom prst="rect">
@@ -7817,7 +7823,7 @@
         </p:nvSpPr>
         <p:spPr>
           <a:xfrm>
-            <a:off x="1188720" y="1965960"/>
+            <a:off x="1188720" y="2369210"/>
             <a:ext cx="6080760" cy="868680"/>
           </a:xfrm>
           <a:prstGeom prst="rect">
@@ -7866,7 +7872,7 @@
         </p:nvSpPr>
         <p:spPr>
           <a:xfrm>
-            <a:off x="7498080" y="2002536"/>
+            <a:off x="7498080" y="2405786"/>
             <a:ext cx="4142232" cy="795528"/>
           </a:xfrm>
           <a:prstGeom prst="roundRect">
@@ -7893,7 +7899,7 @@
         </p:nvSpPr>
         <p:spPr>
           <a:xfrm>
-            <a:off x="7589520" y="2002536"/>
+            <a:off x="7589520" y="2405786"/>
             <a:ext cx="3959352" cy="795528"/>
           </a:xfrm>
           <a:prstGeom prst="rect">
@@ -7961,7 +7967,7 @@
         </p:nvSpPr>
         <p:spPr>
           <a:xfrm>
-            <a:off x="548640" y="3168396"/>
+            <a:off x="548640" y="3571646"/>
             <a:ext cx="457200" cy="457200"/>
           </a:xfrm>
           <a:prstGeom prst="ellipse">
@@ -7986,7 +7992,7 @@
         </p:nvSpPr>
         <p:spPr>
           <a:xfrm>
-            <a:off x="548640" y="3168396"/>
+            <a:off x="548640" y="3571646"/>
             <a:ext cx="457200" cy="457200"/>
           </a:xfrm>
           <a:prstGeom prst="rect">
@@ -8024,7 +8030,7 @@
         </p:nvSpPr>
         <p:spPr>
           <a:xfrm>
-            <a:off x="1188720" y="2962656"/>
+            <a:off x="1188720" y="3365906"/>
             <a:ext cx="6080760" cy="868680"/>
           </a:xfrm>
           <a:prstGeom prst="rect">
@@ -8073,7 +8079,7 @@
         </p:nvSpPr>
         <p:spPr>
           <a:xfrm>
-            <a:off x="7498080" y="2999232"/>
+            <a:off x="7498080" y="3402482"/>
             <a:ext cx="4142232" cy="795528"/>
           </a:xfrm>
           <a:prstGeom prst="roundRect">
@@ -8100,7 +8106,7 @@
         </p:nvSpPr>
         <p:spPr>
           <a:xfrm>
-            <a:off x="7589520" y="2999232"/>
+            <a:off x="7589520" y="3402482"/>
             <a:ext cx="3959352" cy="795528"/>
           </a:xfrm>
           <a:prstGeom prst="rect">
@@ -8168,7 +8174,7 @@
         </p:nvSpPr>
         <p:spPr>
           <a:xfrm>
-            <a:off x="548640" y="4165092"/>
+            <a:off x="548640" y="4568342"/>
             <a:ext cx="457200" cy="457200"/>
           </a:xfrm>
           <a:prstGeom prst="ellipse">
@@ -8193,7 +8199,7 @@
         </p:nvSpPr>
         <p:spPr>
           <a:xfrm>
-            <a:off x="548640" y="4165092"/>
+            <a:off x="548640" y="4568342"/>
             <a:ext cx="457200" cy="457200"/>
           </a:xfrm>
           <a:prstGeom prst="rect">
@@ -8231,7 +8237,7 @@
         </p:nvSpPr>
         <p:spPr>
           <a:xfrm>
-            <a:off x="1188720" y="3959352"/>
+            <a:off x="1188720" y="4362602"/>
             <a:ext cx="6080760" cy="868680"/>
           </a:xfrm>
           <a:prstGeom prst="rect">
@@ -8299,7 +8305,7 @@
         </p:nvSpPr>
         <p:spPr>
           <a:xfrm>
-            <a:off x="7498080" y="3995928"/>
+            <a:off x="7498080" y="4399178"/>
             <a:ext cx="4142232" cy="795528"/>
           </a:xfrm>
           <a:prstGeom prst="roundRect">
@@ -8326,7 +8332,7 @@
         </p:nvSpPr>
         <p:spPr>
           <a:xfrm>
-            <a:off x="7589520" y="3995928"/>
+            <a:off x="7589520" y="4399178"/>
             <a:ext cx="3959352" cy="795528"/>
           </a:xfrm>
           <a:prstGeom prst="rect">
@@ -8769,16 +8775,40 @@
           </a:p>
         </p:txBody>
       </p:sp>
-      <p:sp>
-        <p:nvSpPr>
-          <p:cNvPr id="3" name="panel"/>
+      <p:pic>
+        <p:nvPicPr>
+          <p:cNvPr id="3" name="imagen" descr="C:\Users\Chingu\AppData\Local\Temp\claude\C--Users-Chingu-Desktop-ACADEMIASEULWEB\d4111e1b-5523-44ea-97b2-b1a1d9545b9e\scratchpad\decks\cache\img_49ff0ebd200c21c6.png"/>
+          <p:cNvPicPr>
+            <a:picLocks noChangeAspect="1"/>
+          </p:cNvPicPr>
+          <p:nvPr/>
+        </p:nvPicPr>
+        <p:blipFill>
+          <a:blip r:embed="rId3"/>
+          <a:stretch>
+            <a:fillRect/>
+          </a:stretch>
+        </p:blipFill>
+        <p:spPr>
+          <a:xfrm>
+            <a:off x="7754112" y="1508760"/>
+            <a:ext cx="3886200" cy="4480560"/>
+          </a:xfrm>
+          <a:prstGeom prst="rect">
+            <a:avLst/>
+          </a:prstGeom>
+        </p:spPr>
+      </p:pic>
+      <p:sp>
+        <p:nvSpPr>
+          <p:cNvPr id="4" name="panel"/>
           <p:cNvSpPr/>
           <p:nvPr/>
         </p:nvSpPr>
         <p:spPr>
           <a:xfrm>
-            <a:off x="1280160" y="1645920"/>
-            <a:ext cx="9628632" cy="3108960"/>
+            <a:off x="548640" y="1645920"/>
+            <a:ext cx="6931152" cy="3108960"/>
           </a:xfrm>
           <a:prstGeom prst="roundRect">
             <a:avLst>
@@ -8798,14 +8828,14 @@
       </p:sp>
       <p:sp>
         <p:nvSpPr>
-          <p:cNvPr id="4" name="frase_ko"/>
+          <p:cNvPr id="5" name="frase_ko"/>
           <p:cNvSpPr txBox="1"/>
           <p:nvPr/>
         </p:nvSpPr>
         <p:spPr>
           <a:xfrm>
-            <a:off x="1463040" y="1828800"/>
-            <a:ext cx="9262872" cy="1828800"/>
+            <a:off x="731520" y="1828800"/>
+            <a:ext cx="6565392" cy="1828800"/>
           </a:xfrm>
           <a:prstGeom prst="rect">
             <a:avLst/>
@@ -8823,7 +8853,7 @@
               <a:buNone/>
             </a:pPr>
             <a:r>
-              <a:rPr lang="ko-KR" altLang="en-US" sz="4500" b="1" dirty="0">
+              <a:rPr lang="ko-KR" altLang="en-US" sz="5000" b="1" dirty="0">
                 <a:solidFill>
                   <a:srgbClr val="4236F6"/>
                 </a:solidFill>
@@ -8831,30 +8861,47 @@
                 <a:ea typeface="Malgun Gothic" pitchFamily="34" charset="-122"/>
                 <a:cs typeface="Malgun Gothic" pitchFamily="34" charset="-120"/>
               </a:rPr>
-              <a:t>여름휴가에 제주도에 갈 거예요</a:t>
-            </a:r>
-            <a:r>
-              <a:rPr lang="en-US" sz="4500" b="1" dirty="0">
+              <a:t>여름휴가에</a:t>
+            </a:r>
+            <a:endParaRPr lang="en-US" sz="5000" dirty="0"/>
+          </a:p>
+          <a:p>
+            <a:pPr marL="0" indent="0" algn="ctr" eaLnBrk="1">
+              <a:buNone/>
+            </a:pPr>
+            <a:r>
+              <a:rPr lang="ko-KR" altLang="en-US" sz="5000" b="1" dirty="0">
                 <a:solidFill>
                   <a:srgbClr val="4236F6"/>
                 </a:solidFill>
+                <a:latin typeface="Malgun Gothic" pitchFamily="34" charset="0"/>
+                <a:ea typeface="Malgun Gothic" pitchFamily="34" charset="-122"/>
+                <a:cs typeface="Malgun Gothic" pitchFamily="34" charset="-120"/>
+              </a:rPr>
+              <a:t>제주도에 갈 거예요</a:t>
+            </a:r>
+            <a:r>
+              <a:rPr lang="en-US" sz="5000" b="1" dirty="0">
+                <a:solidFill>
+                  <a:srgbClr val="4236F6"/>
+                </a:solidFill>
               </a:rPr>
               <a:t>.</a:t>
             </a:r>
-            <a:endParaRPr lang="en-US" sz="4500" dirty="0"/>
+            <a:endParaRPr lang="en-US" sz="5000" dirty="0"/>
           </a:p>
         </p:txBody>
       </p:sp>
       <p:sp>
         <p:nvSpPr>
-          <p:cNvPr id="5" name="Text 3"/>
+          <p:cNvPr id="6" name="Text 3"/>
           <p:cNvSpPr txBox="1"/>
           <p:nvPr/>
         </p:nvSpPr>
         <p:spPr>
           <a:xfrm>
-            <a:off x="1463040" y="3657600"/>
-            <a:ext cx="9262872" cy="822960"/>
+            <a:off x="1051560" y="3657600"/>
+            <a:ext cx="5742432" cy="822960"/>
           </a:xfrm>
           <a:prstGeom prst="rect">
             <a:avLst/>
@@ -8885,14 +8932,14 @@
       </p:sp>
       <p:sp>
         <p:nvSpPr>
-          <p:cNvPr id="6" name="lista"/>
+          <p:cNvPr id="7" name="lista"/>
           <p:cNvSpPr txBox="1"/>
           <p:nvPr/>
         </p:nvSpPr>
         <p:spPr>
           <a:xfrm>
-            <a:off x="1280160" y="4937760"/>
-            <a:ext cx="9628632" cy="1234440"/>
+            <a:off x="548640" y="4937760"/>
+            <a:ext cx="6931152" cy="1234440"/>
           </a:xfrm>
           <a:prstGeom prst="rect">
             <a:avLst/>
@@ -9085,7 +9132,7 @@
         <p:spPr>
           <a:xfrm>
             <a:off x="548640" y="1325880"/>
-            <a:ext cx="11064240" cy="457200"/>
+            <a:ext cx="11091672" cy="457200"/>
           </a:xfrm>
           <a:prstGeom prst="rect">
             <a:avLst/>
@@ -10559,7 +10606,7 @@
         <p:spPr>
           <a:xfrm>
             <a:off x="548640" y="1325880"/>
-            <a:ext cx="11064240" cy="457200"/>
+            <a:ext cx="11091672" cy="457200"/>
           </a:xfrm>
           <a:prstGeom prst="rect">
             <a:avLst/>
@@ -10703,7 +10750,7 @@
           <p:nvPr>
             <p:extLst>
               <p:ext uri="{D42A27DB-BD31-4B8C-83A1-F6EECF244321}">
-                <p14:modId xmlns:p14="http://schemas.microsoft.com/office/powerpoint/2010/main" val="2224943157"/>
+                <p14:modId xmlns:p14="http://schemas.microsoft.com/office/powerpoint/2010/main" val="363664753"/>
               </p:ext>
             </p:extLst>
           </p:nvPr>
@@ -11886,7 +11933,7 @@
                 <a:ea typeface="Malgun Gothic" pitchFamily="34" charset="-122"/>
                 <a:cs typeface="Malgun Gothic" pitchFamily="34" charset="-120"/>
               </a:rPr>
-              <a:t>두 개</a:t>
+              <a:t>두 개</a:t>
             </a:r>
             <a:r>
               <a:rPr lang="en-US" sz="3000" b="1" dirty="0">
@@ -11925,7 +11972,7 @@
         <p:spPr>
           <a:xfrm>
             <a:off x="548640" y="1325880"/>
-            <a:ext cx="11064240" cy="548640"/>
+            <a:ext cx="11091672" cy="548640"/>
           </a:xfrm>
           <a:prstGeom prst="rect">
             <a:avLst/>
@@ -12049,7 +12096,7 @@
         </p:nvSpPr>
         <p:spPr>
           <a:xfrm>
-            <a:off x="548640" y="2171700"/>
+            <a:off x="548640" y="2841955"/>
             <a:ext cx="457200" cy="457200"/>
           </a:xfrm>
           <a:prstGeom prst="ellipse">
@@ -12074,7 +12121,7 @@
         </p:nvSpPr>
         <p:spPr>
           <a:xfrm>
-            <a:off x="548640" y="2171700"/>
+            <a:off x="548640" y="2841955"/>
             <a:ext cx="457200" cy="457200"/>
           </a:xfrm>
           <a:prstGeom prst="rect">
@@ -12112,8 +12159,8 @@
         </p:nvSpPr>
         <p:spPr>
           <a:xfrm>
-            <a:off x="1188720" y="1965960"/>
-            <a:ext cx="6080760" cy="868680"/>
+            <a:off x="1188720" y="2476195"/>
+            <a:ext cx="6080760" cy="1188720"/>
           </a:xfrm>
           <a:prstGeom prst="rect">
             <a:avLst/>
@@ -12158,7 +12205,7 @@
                 <a:ea typeface="Malgun Gothic" pitchFamily="34" charset="-122"/>
                 <a:cs typeface="Malgun Gothic" pitchFamily="34" charset="-120"/>
               </a:rPr>
-              <a:t>두 개</a:t>
+              <a:t>두 개</a:t>
             </a:r>
             <a:r>
               <a:rPr lang="en-US" sz="2400" dirty="0">
@@ -12180,12 +12227,12 @@
         </p:nvSpPr>
         <p:spPr>
           <a:xfrm>
-            <a:off x="7498080" y="2002536"/>
-            <a:ext cx="4142232" cy="795528"/>
+            <a:off x="7498080" y="2512771"/>
+            <a:ext cx="4142232" cy="1115568"/>
           </a:xfrm>
           <a:prstGeom prst="roundRect">
             <a:avLst>
-              <a:gd name="adj" fmla="val 13793"/>
+              <a:gd name="adj" fmla="val 9836"/>
             </a:avLst>
           </a:prstGeom>
           <a:solidFill>
@@ -12207,8 +12254,8 @@
         </p:nvSpPr>
         <p:spPr>
           <a:xfrm>
-            <a:off x="7589520" y="2002536"/>
-            <a:ext cx="3959352" cy="795528"/>
+            <a:off x="7589520" y="2512771"/>
+            <a:ext cx="3959352" cy="1115568"/>
           </a:xfrm>
           <a:prstGeom prst="rect">
             <a:avLst/>
@@ -12256,7 +12303,7 @@
         </p:nvSpPr>
         <p:spPr>
           <a:xfrm>
-            <a:off x="548640" y="3168396"/>
+            <a:off x="548640" y="4158691"/>
             <a:ext cx="457200" cy="457200"/>
           </a:xfrm>
           <a:prstGeom prst="ellipse">
@@ -12281,7 +12328,7 @@
         </p:nvSpPr>
         <p:spPr>
           <a:xfrm>
-            <a:off x="548640" y="3168396"/>
+            <a:off x="548640" y="4158691"/>
             <a:ext cx="457200" cy="457200"/>
           </a:xfrm>
           <a:prstGeom prst="rect">
@@ -12319,8 +12366,8 @@
         </p:nvSpPr>
         <p:spPr>
           <a:xfrm>
-            <a:off x="1188720" y="2962656"/>
-            <a:ext cx="6080760" cy="868680"/>
+            <a:off x="1188720" y="3792931"/>
+            <a:ext cx="6080760" cy="1188720"/>
           </a:xfrm>
           <a:prstGeom prst="rect">
             <a:avLst/>
@@ -12406,12 +12453,12 @@
         </p:nvSpPr>
         <p:spPr>
           <a:xfrm>
-            <a:off x="7498080" y="2999232"/>
-            <a:ext cx="4142232" cy="795528"/>
+            <a:off x="7498080" y="3829507"/>
+            <a:ext cx="4142232" cy="1115568"/>
           </a:xfrm>
           <a:prstGeom prst="roundRect">
             <a:avLst>
-              <a:gd name="adj" fmla="val 13793"/>
+              <a:gd name="adj" fmla="val 9836"/>
             </a:avLst>
           </a:prstGeom>
           <a:solidFill>
@@ -12433,8 +12480,8 @@
         </p:nvSpPr>
         <p:spPr>
           <a:xfrm>
-            <a:off x="7589520" y="2999232"/>
-            <a:ext cx="3959352" cy="795528"/>
+            <a:off x="7589520" y="3829507"/>
+            <a:ext cx="3959352" cy="1115568"/>
           </a:xfrm>
           <a:prstGeom prst="rect">
             <a:avLst/>
@@ -12779,16 +12826,40 @@
           </a:p>
         </p:txBody>
       </p:sp>
-      <p:sp>
-        <p:nvSpPr>
-          <p:cNvPr id="3" name="panel"/>
+      <p:pic>
+        <p:nvPicPr>
+          <p:cNvPr id="3" name="imagen" descr="C:\Users\Chingu\AppData\Local\Temp\claude\C--Users-Chingu-Desktop-ACADEMIASEULWEB\d4111e1b-5523-44ea-97b2-b1a1d9545b9e\scratchpad\decks\cache\img_459da47c090ddae2.png"/>
+          <p:cNvPicPr>
+            <a:picLocks noChangeAspect="1"/>
+          </p:cNvPicPr>
+          <p:nvPr/>
+        </p:nvPicPr>
+        <p:blipFill>
+          <a:blip r:embed="rId3"/>
+          <a:stretch>
+            <a:fillRect/>
+          </a:stretch>
+        </p:blipFill>
+        <p:spPr>
+          <a:xfrm>
+            <a:off x="7754112" y="1508760"/>
+            <a:ext cx="3886200" cy="4480560"/>
+          </a:xfrm>
+          <a:prstGeom prst="rect">
+            <a:avLst/>
+          </a:prstGeom>
+        </p:spPr>
+      </p:pic>
+      <p:sp>
+        <p:nvSpPr>
+          <p:cNvPr id="4" name="panel"/>
           <p:cNvSpPr/>
           <p:nvPr/>
         </p:nvSpPr>
         <p:spPr>
           <a:xfrm>
-            <a:off x="1280160" y="1645920"/>
-            <a:ext cx="9628632" cy="3108960"/>
+            <a:off x="548640" y="1645920"/>
+            <a:ext cx="6931152" cy="3108960"/>
           </a:xfrm>
           <a:prstGeom prst="roundRect">
             <a:avLst>
@@ -12808,14 +12879,14 @@
       </p:sp>
       <p:sp>
         <p:nvSpPr>
-          <p:cNvPr id="4" name="frase_ko"/>
+          <p:cNvPr id="5" name="frase_ko"/>
           <p:cNvSpPr txBox="1"/>
           <p:nvPr/>
         </p:nvSpPr>
         <p:spPr>
           <a:xfrm>
-            <a:off x="1463040" y="1828800"/>
-            <a:ext cx="9262872" cy="1828800"/>
+            <a:off x="731520" y="1828800"/>
+            <a:ext cx="6565392" cy="1828800"/>
           </a:xfrm>
           <a:prstGeom prst="rect">
             <a:avLst/>
@@ -12833,38 +12904,66 @@
               <a:buNone/>
             </a:pPr>
             <a:r>
-              <a:rPr lang="ko-KR" altLang="en-US" sz="4600" b="1" dirty="0">
-                <a:solidFill>
-                  <a:srgbClr val="4236F6"/>
+              <a:rPr lang="ko-KR" altLang="en-US" sz="5400" b="1" dirty="0">
+                <a:solidFill>
+                  <a:srgbClr val="003478"/>
                 </a:solidFill>
                 <a:latin typeface="Malgun Gothic" pitchFamily="34" charset="0"/>
                 <a:ea typeface="Malgun Gothic" pitchFamily="34" charset="-122"/>
                 <a:cs typeface="Malgun Gothic" pitchFamily="34" charset="-120"/>
               </a:rPr>
-              <a:t>어제 한국은 빼빼로데이였어요</a:t>
-            </a:r>
-            <a:r>
-              <a:rPr lang="en-US" sz="4600" b="1" dirty="0">
+              <a:t>어제 한국은</a:t>
+            </a:r>
+            <a:endParaRPr lang="en-US" sz="5400" dirty="0"/>
+          </a:p>
+          <a:p>
+            <a:pPr marL="0" indent="0" algn="ctr" eaLnBrk="1">
+              <a:buNone/>
+            </a:pPr>
+            <a:r>
+              <a:rPr lang="ko-KR" altLang="en-US" sz="5400" b="1" dirty="0">
+                <a:solidFill>
+                  <a:srgbClr val="003478"/>
+                </a:solidFill>
+                <a:latin typeface="Malgun Gothic" pitchFamily="34" charset="0"/>
+                <a:ea typeface="Malgun Gothic" pitchFamily="34" charset="-122"/>
+                <a:cs typeface="Malgun Gothic" pitchFamily="34" charset="-120"/>
+              </a:rPr>
+              <a:t>빼빼로데이</a:t>
+            </a:r>
+            <a:r>
+              <a:rPr lang="ko-KR" altLang="en-US" sz="5400" b="1" dirty="0">
                 <a:solidFill>
                   <a:srgbClr val="4236F6"/>
                 </a:solidFill>
+                <a:latin typeface="Malgun Gothic" pitchFamily="34" charset="0"/>
+                <a:ea typeface="Malgun Gothic" pitchFamily="34" charset="-122"/>
+                <a:cs typeface="Malgun Gothic" pitchFamily="34" charset="-120"/>
+              </a:rPr>
+              <a:t>였어요</a:t>
+            </a:r>
+            <a:r>
+              <a:rPr lang="en-US" sz="5400" b="1" dirty="0">
+                <a:solidFill>
+                  <a:srgbClr val="003478"/>
+                </a:solidFill>
               </a:rPr>
               <a:t>.</a:t>
             </a:r>
-            <a:endParaRPr lang="en-US" sz="4600" dirty="0"/>
+            <a:endParaRPr lang="en-US" sz="5400" dirty="0"/>
           </a:p>
         </p:txBody>
       </p:sp>
       <p:sp>
         <p:nvSpPr>
-          <p:cNvPr id="5" name="Text 3"/>
+          <p:cNvPr id="6" name="Text 3"/>
           <p:cNvSpPr txBox="1"/>
           <p:nvPr/>
         </p:nvSpPr>
         <p:spPr>
           <a:xfrm>
-            <a:off x="1463040" y="3657600"/>
-            <a:ext cx="9262872" cy="822960"/>
+            <a:off x="1051560" y="3657600"/>
+            <a:ext cx="5742432" cy="822960"/>
           </a:xfrm>
           <a:prstGeom prst="rect">
             <a:avLst/>
@@ -12906,14 +13005,14 @@
       </p:sp>
       <p:sp>
         <p:nvSpPr>
-          <p:cNvPr id="6" name="lista"/>
+          <p:cNvPr id="7" name="lista"/>
           <p:cNvSpPr txBox="1"/>
           <p:nvPr/>
         </p:nvSpPr>
         <p:spPr>
           <a:xfrm>
-            <a:off x="1280160" y="4937760"/>
-            <a:ext cx="9628632" cy="1234440"/>
+            <a:off x="548640" y="4937760"/>
+            <a:ext cx="6931152" cy="1234440"/>
           </a:xfrm>
           <a:prstGeom prst="rect">
             <a:avLst/>
@@ -13900,7 +13999,7 @@
                 <a:ea typeface="Malgun Gothic" pitchFamily="34" charset="-122"/>
                 <a:cs typeface="Malgun Gothic" pitchFamily="34" charset="-120"/>
               </a:rPr>
-              <a:t>열 시에 만나요</a:t>
+              <a:t>열 시에 만나요</a:t>
             </a:r>
             <a:r>
               <a:rPr lang="en-US" sz="2000" dirty="0">
@@ -14162,7 +14261,7 @@
         <p:spPr>
           <a:xfrm>
             <a:off x="548640" y="1325880"/>
-            <a:ext cx="11064240" cy="457200"/>
+            <a:ext cx="11091672" cy="457200"/>
           </a:xfrm>
           <a:prstGeom prst="rect">
             <a:avLst/>
@@ -15024,8 +15123,8 @@
         </p:nvSpPr>
         <p:spPr>
           <a:xfrm>
-            <a:off x="1463040" y="3657600"/>
-            <a:ext cx="9262872" cy="822960"/>
+            <a:off x="1783080" y="3657600"/>
+            <a:ext cx="8439912" cy="822960"/>
           </a:xfrm>
           <a:prstGeom prst="rect">
             <a:avLst/>
@@ -15297,7 +15396,7 @@
               <a:buChar char="•"/>
             </a:pPr>
             <a:r>
-              <a:rPr lang="ko-KR" altLang="en-US" sz="2400" dirty="0">
+              <a:rPr lang="ko-KR" altLang="en-US" sz="2800" dirty="0">
                 <a:solidFill>
                   <a:srgbClr val="14142B"/>
                 </a:solidFill>
@@ -15308,7 +15407,7 @@
               <a:t>갈 거예요 </a:t>
             </a:r>
             <a:r>
-              <a:rPr lang="en-US" sz="2400" dirty="0">
+              <a:rPr lang="en-US" sz="2800" dirty="0">
                 <a:solidFill>
                   <a:srgbClr val="14142B"/>
                 </a:solidFill>
@@ -15316,7 +15415,7 @@
               <a:t>[</a:t>
             </a:r>
             <a:r>
-              <a:rPr lang="ko-KR" altLang="en-US" sz="2400" dirty="0">
+              <a:rPr lang="ko-KR" altLang="en-US" sz="2800" dirty="0">
                 <a:solidFill>
                   <a:srgbClr val="14142B"/>
                 </a:solidFill>
@@ -15327,7 +15426,7 @@
               <a:t>갈꺼에요</a:t>
             </a:r>
             <a:r>
-              <a:rPr lang="en-US" sz="2400" dirty="0">
+              <a:rPr lang="en-US" sz="2800" dirty="0">
                 <a:solidFill>
                   <a:srgbClr val="14142B"/>
                 </a:solidFill>
@@ -15335,7 +15434,7 @@
               <a:t>] · </a:t>
             </a:r>
             <a:r>
-              <a:rPr lang="ko-KR" altLang="en-US" sz="2400" dirty="0">
+              <a:rPr lang="ko-KR" altLang="en-US" sz="2800" dirty="0">
                 <a:solidFill>
                   <a:srgbClr val="14142B"/>
                 </a:solidFill>
@@ -15346,14 +15445,14 @@
               <a:t>ㅓ</a:t>
             </a:r>
             <a:r>
-              <a:rPr lang="en-US" sz="2400" dirty="0">
+              <a:rPr lang="en-US" sz="2800" dirty="0">
                 <a:solidFill>
                   <a:srgbClr val="14142B"/>
                 </a:solidFill>
               </a:rPr>
               <a:t>, con la boca abierta</a:t>
             </a:r>
-            <a:endParaRPr lang="en-US" sz="2400" dirty="0"/>
+            <a:endParaRPr lang="en-US" sz="2800" dirty="0"/>
           </a:p>
           <a:p>
             <a:pPr marL="228600" indent="-228600" eaLnBrk="1">
@@ -15364,7 +15463,7 @@
               <a:buChar char="•"/>
             </a:pPr>
             <a:r>
-              <a:rPr lang="ko-KR" altLang="en-US" sz="2400" dirty="0">
+              <a:rPr lang="ko-KR" altLang="en-US" sz="2800" dirty="0">
                 <a:solidFill>
                   <a:srgbClr val="14142B"/>
                 </a:solidFill>
@@ -15375,7 +15474,7 @@
               <a:t>비행기로 가요 </a:t>
             </a:r>
             <a:r>
-              <a:rPr lang="en-US" sz="2400" dirty="0">
+              <a:rPr lang="en-US" sz="2800" dirty="0">
                 <a:solidFill>
                   <a:srgbClr val="14142B"/>
                 </a:solidFill>
@@ -15383,7 +15482,7 @@
               <a:t>· </a:t>
             </a:r>
             <a:r>
-              <a:rPr lang="ko-KR" altLang="en-US" sz="2400" dirty="0">
+              <a:rPr lang="ko-KR" altLang="en-US" sz="2800" dirty="0">
                 <a:solidFill>
                   <a:srgbClr val="14142B"/>
                 </a:solidFill>
@@ -15394,14 +15493,14 @@
               <a:t>로 </a:t>
             </a:r>
             <a:r>
-              <a:rPr lang="en-US" sz="2400" dirty="0">
+              <a:rPr lang="en-US" sz="2800" dirty="0">
                 <a:solidFill>
                   <a:srgbClr val="14142B"/>
                 </a:solidFill>
               </a:rPr>
               <a:t>= en qué vas</a:t>
             </a:r>
-            <a:endParaRPr lang="en-US" sz="2400" dirty="0"/>
+            <a:endParaRPr lang="en-US" sz="2800" dirty="0"/>
           </a:p>
           <a:p>
             <a:pPr marL="228600" indent="-228600" eaLnBrk="1">
@@ -15412,7 +15511,7 @@
               <a:buChar char="•"/>
             </a:pPr>
             <a:r>
-              <a:rPr lang="ko-KR" altLang="en-US" sz="2400" dirty="0">
+              <a:rPr lang="ko-KR" altLang="en-US" sz="2800" dirty="0">
                 <a:solidFill>
                   <a:srgbClr val="14142B"/>
                 </a:solidFill>
@@ -15423,14 +15522,14 @@
               <a:t>영화를 보거나 쉴 거예요 </a:t>
             </a:r>
             <a:r>
-              <a:rPr lang="en-US" sz="2400" dirty="0">
+              <a:rPr lang="en-US" sz="2800" dirty="0">
                 <a:solidFill>
                   <a:srgbClr val="14142B"/>
                 </a:solidFill>
               </a:rPr>
               <a:t>· el tiempo, una vez, al final</a:t>
             </a:r>
-            <a:endParaRPr lang="en-US" sz="2400" dirty="0"/>
+            <a:endParaRPr lang="en-US" sz="2800" dirty="0"/>
           </a:p>
         </p:txBody>
       </p:sp>
@@ -15637,7 +15736,7 @@
               <a:buChar char="•"/>
             </a:pPr>
             <a:r>
-              <a:rPr lang="ko-KR" altLang="en-US" sz="2400" dirty="0">
+              <a:rPr lang="ko-KR" altLang="en-US" sz="2800" dirty="0">
                 <a:solidFill>
                   <a:srgbClr val="14142B"/>
                 </a:solidFill>
@@ -15648,14 +15747,14 @@
               <a:t>다음 주에 뭐 할 거예요</a:t>
             </a:r>
             <a:r>
-              <a:rPr lang="en-US" sz="2400" dirty="0">
+              <a:rPr lang="en-US" sz="2800" dirty="0">
                 <a:solidFill>
                   <a:srgbClr val="14142B"/>
                 </a:solidFill>
               </a:rPr>
               <a:t>? — ¿Qué vas a hacer la próxima semana?</a:t>
             </a:r>
-            <a:endParaRPr lang="en-US" sz="2400" dirty="0"/>
+            <a:endParaRPr lang="en-US" sz="2800" dirty="0"/>
           </a:p>
           <a:p>
             <a:pPr marL="228600" indent="-228600" eaLnBrk="1">
@@ -15666,7 +15765,7 @@
               <a:buChar char="•"/>
             </a:pPr>
             <a:r>
-              <a:rPr lang="ko-KR" altLang="en-US" sz="2400" dirty="0">
+              <a:rPr lang="ko-KR" altLang="en-US" sz="2800" dirty="0">
                 <a:solidFill>
                   <a:srgbClr val="14142B"/>
                 </a:solidFill>
@@ -15677,14 +15776,14 @@
               <a:t>기차로 부산에 갈 거예요</a:t>
             </a:r>
             <a:r>
-              <a:rPr lang="en-US" sz="2400" dirty="0">
+              <a:rPr lang="en-US" sz="2800" dirty="0">
                 <a:solidFill>
                   <a:srgbClr val="14142B"/>
                 </a:solidFill>
               </a:rPr>
               <a:t>. — Voy a ir a Busan en tren.</a:t>
             </a:r>
-            <a:endParaRPr lang="en-US" sz="2400" dirty="0"/>
+            <a:endParaRPr lang="en-US" sz="2800" dirty="0"/>
           </a:p>
           <a:p>
             <a:pPr marL="228600" indent="-228600" eaLnBrk="1">
@@ -15695,7 +15794,7 @@
               <a:buChar char="•"/>
             </a:pPr>
             <a:r>
-              <a:rPr lang="ko-KR" altLang="en-US" sz="2400" dirty="0">
+              <a:rPr lang="ko-KR" altLang="en-US" sz="2800" dirty="0">
                 <a:solidFill>
                   <a:srgbClr val="14142B"/>
                 </a:solidFill>
@@ -15706,14 +15805,14 @@
               <a:t>영화를 보거나 쉴 거예요</a:t>
             </a:r>
             <a:r>
-              <a:rPr lang="en-US" sz="2400" dirty="0">
+              <a:rPr lang="en-US" sz="2800" dirty="0">
                 <a:solidFill>
                   <a:srgbClr val="14142B"/>
                 </a:solidFill>
               </a:rPr>
               <a:t>. — Voy a ver una película o a descansar.</a:t>
             </a:r>
-            <a:endParaRPr lang="en-US" sz="2400" dirty="0"/>
+            <a:endParaRPr lang="en-US" sz="2800" dirty="0"/>
           </a:p>
         </p:txBody>
       </p:sp>
@@ -15898,7 +15997,7 @@
         <p:spPr>
           <a:xfrm>
             <a:off x="548640" y="1325880"/>
-            <a:ext cx="6949440" cy="548640"/>
+            <a:ext cx="5669280" cy="548640"/>
           </a:xfrm>
           <a:prstGeom prst="rect">
             <a:avLst/>
@@ -15936,7 +16035,7 @@
         <p:spPr>
           <a:xfrm>
             <a:off x="548640" y="1965960"/>
-            <a:ext cx="6949440" cy="4206240"/>
+            <a:ext cx="5669280" cy="4206240"/>
           </a:xfrm>
           <a:prstGeom prst="rect">
             <a:avLst/>
@@ -16157,12 +16256,12 @@
         </p:nvSpPr>
         <p:spPr>
           <a:xfrm>
-            <a:off x="8001000" y="1417320"/>
-            <a:ext cx="3611880" cy="4480560"/>
+            <a:off x="6446520" y="1371600"/>
+            <a:ext cx="5193792" cy="4800600"/>
           </a:xfrm>
           <a:prstGeom prst="roundRect">
             <a:avLst>
-              <a:gd name="adj" fmla="val 6329"/>
+              <a:gd name="adj" fmla="val 4762"/>
             </a:avLst>
           </a:prstGeom>
           <a:solidFill>
@@ -16176,58 +16275,30 @@
           </a:ln>
         </p:spPr>
       </p:sp>
-      <p:sp>
-        <p:nvSpPr>
-          <p:cNvPr id="6" name="imagen_pendiente"/>
-          <p:cNvSpPr txBox="1"/>
+      <p:pic>
+        <p:nvPicPr>
+          <p:cNvPr id="6" name="imagen" descr="C:/Users/Chingu/Desktop/ACADEMIASEULWEB/Curriculo/fuente/decks/img/B2S5/L24_slide.png"/>
+          <p:cNvPicPr>
+            <a:picLocks noChangeAspect="1"/>
+          </p:cNvPicPr>
           <p:nvPr/>
-        </p:nvSpPr>
-        <p:spPr>
-          <a:xfrm>
-            <a:off x="8183880" y="1600200"/>
-            <a:ext cx="3246120" cy="4114800"/>
+        </p:nvPicPr>
+        <p:blipFill>
+          <a:blip r:embed="rId3"/>
+          <a:stretch>
+            <a:fillRect/>
+          </a:stretch>
+        </p:blipFill>
+        <p:spPr>
+          <a:xfrm>
+            <a:off x="7040549" y="1463040"/>
+            <a:ext cx="4005733" cy="4617720"/>
           </a:xfrm>
           <a:prstGeom prst="rect">
             <a:avLst/>
           </a:prstGeom>
-          <a:noFill/>
-          <a:ln/>
-        </p:spPr>
-        <p:txBody>
-          <a:bodyPr wrap="square" lIns="76200" tIns="76200" rIns="76200" bIns="76200" rtlCol="0" anchor="ctr">
-            <a:normAutofit/>
-          </a:bodyPr>
-          <a:lstStyle/>
-          <a:p>
-            <a:pPr marL="0" indent="0" algn="ctr" eaLnBrk="1">
-              <a:buNone/>
-            </a:pPr>
-            <a:r>
-              <a:rPr lang="en-US" sz="1600" b="1" dirty="0">
-                <a:solidFill>
-                  <a:srgbClr val="4236F6"/>
-                </a:solidFill>
-              </a:rPr>
-              <a:t>Imagen pendiente</a:t>
-            </a:r>
-            <a:endParaRPr lang="en-US" sz="1600" dirty="0"/>
-          </a:p>
-          <a:p>
-            <a:pPr marL="0" indent="0" algn="ctr" eaLnBrk="1">
-              <a:buNone/>
-            </a:pPr>
-            <a:r>
-              <a:rPr lang="en-US" sz="1300" dirty="0">
-                <a:solidFill>
-                  <a:srgbClr val="5C5F6B"/>
-                </a:solidFill>
-              </a:rPr>
-              <a:t>Captura del Lector en Practicar → Palabras, con la línea de corrección tapada (trae romanización)</a:t>
-            </a:r>
-            <a:endParaRPr lang="en-US" sz="1600" dirty="0"/>
-          </a:p>
-        </p:txBody>
-      </p:sp>
+        </p:spPr>
+      </p:pic>
       <p:sp>
         <p:nvSpPr>
           <p:cNvPr id="25" name="Slide Number Placeholder 0"/>
@@ -16520,7 +16591,7 @@
         <p:spPr>
           <a:xfrm>
             <a:off x="548640" y="1325880"/>
-            <a:ext cx="11064240" cy="548640"/>
+            <a:ext cx="11091672" cy="548640"/>
           </a:xfrm>
           <a:prstGeom prst="rect">
             <a:avLst/>
@@ -16638,14 +16709,72 @@
       </p:sp>
       <p:sp>
         <p:nvSpPr>
-          <p:cNvPr id="4" name="num_0"/>
+          <p:cNvPr id="4" name="card_0"/>
           <p:cNvSpPr/>
           <p:nvPr/>
         </p:nvSpPr>
         <p:spPr>
           <a:xfrm>
-            <a:off x="548640" y="2171700"/>
-            <a:ext cx="457200" cy="457200"/>
+            <a:off x="548640" y="1965960"/>
+            <a:ext cx="2635758" cy="4206240"/>
+          </a:xfrm>
+          <a:prstGeom prst="roundRect">
+            <a:avLst>
+              <a:gd name="adj" fmla="val 5204"/>
+            </a:avLst>
+          </a:prstGeom>
+          <a:solidFill>
+            <a:srgbClr val="FFFFFF"/>
+          </a:solidFill>
+          <a:ln w="12700">
+            <a:solidFill>
+              <a:srgbClr val="D9D7F7"/>
+            </a:solidFill>
+            <a:prstDash val="solid"/>
+          </a:ln>
+          <a:effectLst>
+            <a:outerShdw blurRad="76200" dist="25400" dir="5400000" algn="bl" rotWithShape="0">
+              <a:srgbClr val="14142B">
+                <a:alpha val="12000"/>
+              </a:srgbClr>
+            </a:outerShdw>
+          </a:effectLst>
+        </p:spPr>
+      </p:sp>
+      <p:pic>
+        <p:nvPicPr>
+          <p:cNvPr id="5" name="item_img_0" descr="C:\Users\Chingu\AppData\Local\Temp\claude\C--Users-Chingu-Desktop-ACADEMIASEULWEB\d4111e1b-5523-44ea-97b2-b1a1d9545b9e\scratchpad\decks\cache\img_47d9033fe050171c.png"/>
+          <p:cNvPicPr>
+            <a:picLocks noChangeAspect="1"/>
+          </p:cNvPicPr>
+          <p:nvPr/>
+        </p:nvPicPr>
+        <p:blipFill>
+          <a:blip r:embed="rId3"/>
+          <a:stretch>
+            <a:fillRect/>
+          </a:stretch>
+        </p:blipFill>
+        <p:spPr>
+          <a:xfrm>
+            <a:off x="658368" y="2106549"/>
+            <a:ext cx="2416302" cy="2416302"/>
+          </a:xfrm>
+          <a:prstGeom prst="rect">
+            <a:avLst/>
+          </a:prstGeom>
+        </p:spPr>
+      </p:pic>
+      <p:sp>
+        <p:nvSpPr>
+          <p:cNvPr id="6" name="num_0"/>
+          <p:cNvSpPr/>
+          <p:nvPr/>
+        </p:nvSpPr>
+        <p:spPr>
+          <a:xfrm>
+            <a:off x="640080" y="2057400"/>
+            <a:ext cx="420624" cy="420624"/>
           </a:xfrm>
           <a:prstGeom prst="ellipse">
             <a:avLst/>
@@ -16653,9 +16782,9 @@
           <a:solidFill>
             <a:srgbClr val="003478"/>
           </a:solidFill>
-          <a:ln w="12700">
+          <a:ln w="19050">
             <a:solidFill>
-              <a:srgbClr val="003478"/>
+              <a:srgbClr val="FFFFFF"/>
             </a:solidFill>
             <a:prstDash val="solid"/>
           </a:ln>
@@ -16663,14 +16792,14 @@
       </p:sp>
       <p:sp>
         <p:nvSpPr>
-          <p:cNvPr id="5" name="Text 3"/>
+          <p:cNvPr id="7" name="Text 4"/>
           <p:cNvSpPr txBox="1"/>
           <p:nvPr/>
         </p:nvSpPr>
         <p:spPr>
           <a:xfrm>
-            <a:off x="548640" y="2171700"/>
-            <a:ext cx="457200" cy="457200"/>
+            <a:off x="640080" y="2057400"/>
+            <a:ext cx="420624" cy="420624"/>
           </a:xfrm>
           <a:prstGeom prst="rect">
             <a:avLst/>
@@ -16688,27 +16817,27 @@
               <a:buNone/>
             </a:pPr>
             <a:r>
-              <a:rPr lang="en-US" sz="1600" b="1" dirty="0">
+              <a:rPr lang="en-US" sz="1500" b="1" dirty="0">
                 <a:solidFill>
                   <a:srgbClr val="FFFFFF"/>
                 </a:solidFill>
               </a:rPr>
               <a:t>1</a:t>
             </a:r>
-            <a:endParaRPr lang="en-US" sz="1600" dirty="0"/>
+            <a:endParaRPr lang="en-US" sz="1500" dirty="0"/>
           </a:p>
         </p:txBody>
       </p:sp>
       <p:sp>
         <p:nvSpPr>
-          <p:cNvPr id="6" name="Text 4"/>
+          <p:cNvPr id="8" name="Text 5"/>
           <p:cNvSpPr txBox="1"/>
           <p:nvPr/>
         </p:nvSpPr>
         <p:spPr>
           <a:xfrm>
-            <a:off x="1188720" y="1965960"/>
-            <a:ext cx="6080760" cy="868680"/>
+            <a:off x="640080" y="4617720"/>
+            <a:ext cx="2452878" cy="777240"/>
           </a:xfrm>
           <a:prstGeom prst="rect">
             <a:avLst/>
@@ -16722,35 +16851,35 @@
           </a:bodyPr>
           <a:lstStyle/>
           <a:p>
-            <a:pPr marL="0" indent="0" eaLnBrk="1">
+            <a:pPr marL="0" indent="0" algn="ctr" eaLnBrk="1">
               <a:buNone/>
             </a:pPr>
             <a:r>
-              <a:rPr lang="en-US" sz="2400" dirty="0">
+              <a:rPr lang="en-US" sz="2200" dirty="0">
                 <a:solidFill>
                   <a:srgbClr val="14142B"/>
                 </a:solidFill>
               </a:rPr>
               <a:t>Foto 1</a:t>
             </a:r>
-            <a:endParaRPr lang="en-US" sz="2400" dirty="0"/>
+            <a:endParaRPr lang="en-US" sz="2200" dirty="0"/>
           </a:p>
         </p:txBody>
       </p:sp>
       <p:sp>
         <p:nvSpPr>
-          <p:cNvPr id="7" name="rev_10_caja"/>
+          <p:cNvPr id="9" name="rev_10_caja"/>
           <p:cNvSpPr/>
           <p:nvPr/>
         </p:nvSpPr>
         <p:spPr>
           <a:xfrm>
-            <a:off x="7498080" y="2002536"/>
-            <a:ext cx="4142232" cy="795528"/>
+            <a:off x="658368" y="5440680"/>
+            <a:ext cx="2416302" cy="640080"/>
           </a:xfrm>
           <a:prstGeom prst="roundRect">
             <a:avLst>
-              <a:gd name="adj" fmla="val 13793"/>
+              <a:gd name="adj" fmla="val 17143"/>
             </a:avLst>
           </a:prstGeom>
           <a:solidFill>
@@ -16766,14 +16895,14 @@
       </p:sp>
       <p:sp>
         <p:nvSpPr>
-          <p:cNvPr id="8" name="rev_10_txt"/>
+          <p:cNvPr id="10" name="rev_10_txt"/>
           <p:cNvSpPr txBox="1"/>
           <p:nvPr/>
         </p:nvSpPr>
         <p:spPr>
           <a:xfrm>
-            <a:off x="7589520" y="2002536"/>
-            <a:ext cx="3959352" cy="795528"/>
+            <a:off x="685800" y="5440680"/>
+            <a:ext cx="2361438" cy="640080"/>
           </a:xfrm>
           <a:prstGeom prst="rect">
             <a:avLst/>
@@ -16791,7 +16920,7 @@
               <a:buNone/>
             </a:pPr>
             <a:r>
-              <a:rPr lang="ko-KR" altLang="en-US" sz="2200" b="1" dirty="0">
+              <a:rPr lang="ko-KR" altLang="en-US" sz="2000" b="1" dirty="0">
                 <a:solidFill>
                   <a:srgbClr val="FFFFFF"/>
                 </a:solidFill>
@@ -16801,20 +16930,78 @@
               </a:rPr>
               <a:t>서울</a:t>
             </a:r>
-            <a:endParaRPr lang="en-US" sz="2200" dirty="0"/>
+            <a:endParaRPr lang="en-US" sz="2000" dirty="0"/>
           </a:p>
         </p:txBody>
       </p:sp>
       <p:sp>
         <p:nvSpPr>
-          <p:cNvPr id="9" name="num_1"/>
+          <p:cNvPr id="11" name="card_1"/>
           <p:cNvSpPr/>
           <p:nvPr/>
         </p:nvSpPr>
         <p:spPr>
           <a:xfrm>
-            <a:off x="548640" y="3168396"/>
-            <a:ext cx="457200" cy="457200"/>
+            <a:off x="3367278" y="1965960"/>
+            <a:ext cx="2635758" cy="4206240"/>
+          </a:xfrm>
+          <a:prstGeom prst="roundRect">
+            <a:avLst>
+              <a:gd name="adj" fmla="val 5204"/>
+            </a:avLst>
+          </a:prstGeom>
+          <a:solidFill>
+            <a:srgbClr val="FFFFFF"/>
+          </a:solidFill>
+          <a:ln w="12700">
+            <a:solidFill>
+              <a:srgbClr val="D9D7F7"/>
+            </a:solidFill>
+            <a:prstDash val="solid"/>
+          </a:ln>
+          <a:effectLst>
+            <a:outerShdw blurRad="76200" dist="25400" dir="5400000" algn="bl" rotWithShape="0">
+              <a:srgbClr val="14142B">
+                <a:alpha val="12000"/>
+              </a:srgbClr>
+            </a:outerShdw>
+          </a:effectLst>
+        </p:spPr>
+      </p:sp>
+      <p:pic>
+        <p:nvPicPr>
+          <p:cNvPr id="12" name="item_img_1" descr="C:\Users\Chingu\AppData\Local\Temp\claude\C--Users-Chingu-Desktop-ACADEMIASEULWEB\d4111e1b-5523-44ea-97b2-b1a1d9545b9e\scratchpad\decks\cache\img_659428b678fd4e2e.png"/>
+          <p:cNvPicPr>
+            <a:picLocks noChangeAspect="1"/>
+          </p:cNvPicPr>
+          <p:nvPr/>
+        </p:nvPicPr>
+        <p:blipFill>
+          <a:blip r:embed="rId4"/>
+          <a:stretch>
+            <a:fillRect/>
+          </a:stretch>
+        </p:blipFill>
+        <p:spPr>
+          <a:xfrm>
+            <a:off x="3477006" y="2106549"/>
+            <a:ext cx="2416302" cy="2416302"/>
+          </a:xfrm>
+          <a:prstGeom prst="rect">
+            <a:avLst/>
+          </a:prstGeom>
+        </p:spPr>
+      </p:pic>
+      <p:sp>
+        <p:nvSpPr>
+          <p:cNvPr id="13" name="num_1"/>
+          <p:cNvSpPr/>
+          <p:nvPr/>
+        </p:nvSpPr>
+        <p:spPr>
+          <a:xfrm>
+            <a:off x="3458718" y="2057400"/>
+            <a:ext cx="420624" cy="420624"/>
           </a:xfrm>
           <a:prstGeom prst="ellipse">
             <a:avLst/>
@@ -16822,9 +17009,9 @@
           <a:solidFill>
             <a:srgbClr val="003478"/>
           </a:solidFill>
-          <a:ln w="12700">
+          <a:ln w="19050">
             <a:solidFill>
-              <a:srgbClr val="003478"/>
+              <a:srgbClr val="FFFFFF"/>
             </a:solidFill>
             <a:prstDash val="solid"/>
           </a:ln>
@@ -16832,14 +17019,14 @@
       </p:sp>
       <p:sp>
         <p:nvSpPr>
-          <p:cNvPr id="10" name="Text 8"/>
+          <p:cNvPr id="14" name="Text 10"/>
           <p:cNvSpPr txBox="1"/>
           <p:nvPr/>
         </p:nvSpPr>
         <p:spPr>
           <a:xfrm>
-            <a:off x="548640" y="3168396"/>
-            <a:ext cx="457200" cy="457200"/>
+            <a:off x="3458718" y="2057400"/>
+            <a:ext cx="420624" cy="420624"/>
           </a:xfrm>
           <a:prstGeom prst="rect">
             <a:avLst/>
@@ -16857,27 +17044,27 @@
               <a:buNone/>
             </a:pPr>
             <a:r>
-              <a:rPr lang="en-US" sz="1600" b="1" dirty="0">
+              <a:rPr lang="en-US" sz="1500" b="1" dirty="0">
                 <a:solidFill>
                   <a:srgbClr val="FFFFFF"/>
                 </a:solidFill>
               </a:rPr>
               <a:t>2</a:t>
             </a:r>
-            <a:endParaRPr lang="en-US" sz="1600" dirty="0"/>
+            <a:endParaRPr lang="en-US" sz="1500" dirty="0"/>
           </a:p>
         </p:txBody>
       </p:sp>
       <p:sp>
         <p:nvSpPr>
-          <p:cNvPr id="11" name="Text 9"/>
+          <p:cNvPr id="15" name="Text 11"/>
           <p:cNvSpPr txBox="1"/>
           <p:nvPr/>
         </p:nvSpPr>
         <p:spPr>
           <a:xfrm>
-            <a:off x="1188720" y="2962656"/>
-            <a:ext cx="6080760" cy="868680"/>
+            <a:off x="3458718" y="4617720"/>
+            <a:ext cx="2452878" cy="777240"/>
           </a:xfrm>
           <a:prstGeom prst="rect">
             <a:avLst/>
@@ -16891,35 +17078,35 @@
           </a:bodyPr>
           <a:lstStyle/>
           <a:p>
-            <a:pPr marL="0" indent="0" eaLnBrk="1">
+            <a:pPr marL="0" indent="0" algn="ctr" eaLnBrk="1">
               <a:buNone/>
             </a:pPr>
             <a:r>
-              <a:rPr lang="en-US" sz="2400" dirty="0">
+              <a:rPr lang="en-US" sz="2200" dirty="0">
                 <a:solidFill>
                   <a:srgbClr val="14142B"/>
                 </a:solidFill>
               </a:rPr>
               <a:t>Foto 2</a:t>
             </a:r>
-            <a:endParaRPr lang="en-US" sz="2400" dirty="0"/>
+            <a:endParaRPr lang="en-US" sz="2200" dirty="0"/>
           </a:p>
         </p:txBody>
       </p:sp>
       <p:sp>
         <p:nvSpPr>
-          <p:cNvPr id="12" name="rev_11_caja"/>
+          <p:cNvPr id="16" name="rev_11_caja"/>
           <p:cNvSpPr/>
           <p:nvPr/>
         </p:nvSpPr>
         <p:spPr>
           <a:xfrm>
-            <a:off x="7498080" y="2999232"/>
-            <a:ext cx="4142232" cy="795528"/>
+            <a:off x="3477006" y="5440680"/>
+            <a:ext cx="2416302" cy="640080"/>
           </a:xfrm>
           <a:prstGeom prst="roundRect">
             <a:avLst>
-              <a:gd name="adj" fmla="val 13793"/>
+              <a:gd name="adj" fmla="val 17143"/>
             </a:avLst>
           </a:prstGeom>
           <a:solidFill>
@@ -16935,14 +17122,14 @@
       </p:sp>
       <p:sp>
         <p:nvSpPr>
-          <p:cNvPr id="13" name="rev_11_txt"/>
+          <p:cNvPr id="17" name="rev_11_txt"/>
           <p:cNvSpPr txBox="1"/>
           <p:nvPr/>
         </p:nvSpPr>
         <p:spPr>
           <a:xfrm>
-            <a:off x="7589520" y="2999232"/>
-            <a:ext cx="3959352" cy="795528"/>
+            <a:off x="3504438" y="5440680"/>
+            <a:ext cx="2361438" cy="640080"/>
           </a:xfrm>
           <a:prstGeom prst="rect">
             <a:avLst/>
@@ -16960,7 +17147,7 @@
               <a:buNone/>
             </a:pPr>
             <a:r>
-              <a:rPr lang="ko-KR" altLang="en-US" sz="2200" b="1" dirty="0">
+              <a:rPr lang="ko-KR" altLang="en-US" sz="2000" b="1" dirty="0">
                 <a:solidFill>
                   <a:srgbClr val="FFFFFF"/>
                 </a:solidFill>
@@ -16970,20 +17157,78 @@
               </a:rPr>
               <a:t>부산</a:t>
             </a:r>
-            <a:endParaRPr lang="en-US" sz="2200" dirty="0"/>
+            <a:endParaRPr lang="en-US" sz="2000" dirty="0"/>
           </a:p>
         </p:txBody>
       </p:sp>
       <p:sp>
         <p:nvSpPr>
-          <p:cNvPr id="14" name="num_2"/>
+          <p:cNvPr id="18" name="card_2"/>
           <p:cNvSpPr/>
           <p:nvPr/>
         </p:nvSpPr>
         <p:spPr>
           <a:xfrm>
-            <a:off x="548640" y="4165092"/>
-            <a:ext cx="457200" cy="457200"/>
+            <a:off x="6185916" y="1965960"/>
+            <a:ext cx="2635758" cy="4206240"/>
+          </a:xfrm>
+          <a:prstGeom prst="roundRect">
+            <a:avLst>
+              <a:gd name="adj" fmla="val 5204"/>
+            </a:avLst>
+          </a:prstGeom>
+          <a:solidFill>
+            <a:srgbClr val="FFFFFF"/>
+          </a:solidFill>
+          <a:ln w="12700">
+            <a:solidFill>
+              <a:srgbClr val="D9D7F7"/>
+            </a:solidFill>
+            <a:prstDash val="solid"/>
+          </a:ln>
+          <a:effectLst>
+            <a:outerShdw blurRad="76200" dist="25400" dir="5400000" algn="bl" rotWithShape="0">
+              <a:srgbClr val="14142B">
+                <a:alpha val="12000"/>
+              </a:srgbClr>
+            </a:outerShdw>
+          </a:effectLst>
+        </p:spPr>
+      </p:sp>
+      <p:pic>
+        <p:nvPicPr>
+          <p:cNvPr id="19" name="item_img_2" descr="C:\Users\Chingu\AppData\Local\Temp\claude\C--Users-Chingu-Desktop-ACADEMIASEULWEB\d4111e1b-5523-44ea-97b2-b1a1d9545b9e\scratchpad\decks\cache\img_f1bc48cd970c0caf.png"/>
+          <p:cNvPicPr>
+            <a:picLocks noChangeAspect="1"/>
+          </p:cNvPicPr>
+          <p:nvPr/>
+        </p:nvPicPr>
+        <p:blipFill>
+          <a:blip r:embed="rId5"/>
+          <a:stretch>
+            <a:fillRect/>
+          </a:stretch>
+        </p:blipFill>
+        <p:spPr>
+          <a:xfrm>
+            <a:off x="6295644" y="2106549"/>
+            <a:ext cx="2416302" cy="2416302"/>
+          </a:xfrm>
+          <a:prstGeom prst="rect">
+            <a:avLst/>
+          </a:prstGeom>
+        </p:spPr>
+      </p:pic>
+      <p:sp>
+        <p:nvSpPr>
+          <p:cNvPr id="20" name="num_2"/>
+          <p:cNvSpPr/>
+          <p:nvPr/>
+        </p:nvSpPr>
+        <p:spPr>
+          <a:xfrm>
+            <a:off x="6277356" y="2057400"/>
+            <a:ext cx="420624" cy="420624"/>
           </a:xfrm>
           <a:prstGeom prst="ellipse">
             <a:avLst/>
@@ -16991,9 +17236,9 @@
           <a:solidFill>
             <a:srgbClr val="003478"/>
           </a:solidFill>
-          <a:ln w="12700">
+          <a:ln w="19050">
             <a:solidFill>
-              <a:srgbClr val="003478"/>
+              <a:srgbClr val="FFFFFF"/>
             </a:solidFill>
             <a:prstDash val="solid"/>
           </a:ln>
@@ -17001,14 +17246,14 @@
       </p:sp>
       <p:sp>
         <p:nvSpPr>
-          <p:cNvPr id="15" name="Text 13"/>
+          <p:cNvPr id="21" name="Text 16"/>
           <p:cNvSpPr txBox="1"/>
           <p:nvPr/>
         </p:nvSpPr>
         <p:spPr>
           <a:xfrm>
-            <a:off x="548640" y="4165092"/>
-            <a:ext cx="457200" cy="457200"/>
+            <a:off x="6277356" y="2057400"/>
+            <a:ext cx="420624" cy="420624"/>
           </a:xfrm>
           <a:prstGeom prst="rect">
             <a:avLst/>
@@ -17026,27 +17271,27 @@
               <a:buNone/>
             </a:pPr>
             <a:r>
-              <a:rPr lang="en-US" sz="1600" b="1" dirty="0">
+              <a:rPr lang="en-US" sz="1500" b="1" dirty="0">
                 <a:solidFill>
                   <a:srgbClr val="FFFFFF"/>
                 </a:solidFill>
               </a:rPr>
               <a:t>3</a:t>
             </a:r>
-            <a:endParaRPr lang="en-US" sz="1600" dirty="0"/>
+            <a:endParaRPr lang="en-US" sz="1500" dirty="0"/>
           </a:p>
         </p:txBody>
       </p:sp>
       <p:sp>
         <p:nvSpPr>
-          <p:cNvPr id="16" name="Text 14"/>
+          <p:cNvPr id="22" name="Text 17"/>
           <p:cNvSpPr txBox="1"/>
           <p:nvPr/>
         </p:nvSpPr>
         <p:spPr>
           <a:xfrm>
-            <a:off x="1188720" y="3959352"/>
-            <a:ext cx="6080760" cy="868680"/>
+            <a:off x="6277356" y="4617720"/>
+            <a:ext cx="2452878" cy="777240"/>
           </a:xfrm>
           <a:prstGeom prst="rect">
             <a:avLst/>
@@ -17060,35 +17305,35 @@
           </a:bodyPr>
           <a:lstStyle/>
           <a:p>
-            <a:pPr marL="0" indent="0" eaLnBrk="1">
+            <a:pPr marL="0" indent="0" algn="ctr" eaLnBrk="1">
               <a:buNone/>
             </a:pPr>
             <a:r>
-              <a:rPr lang="en-US" sz="2400" dirty="0">
+              <a:rPr lang="en-US" sz="2200" dirty="0">
                 <a:solidFill>
                   <a:srgbClr val="14142B"/>
                 </a:solidFill>
               </a:rPr>
               <a:t>Foto 3</a:t>
             </a:r>
-            <a:endParaRPr lang="en-US" sz="2400" dirty="0"/>
+            <a:endParaRPr lang="en-US" sz="2200" dirty="0"/>
           </a:p>
         </p:txBody>
       </p:sp>
       <p:sp>
         <p:nvSpPr>
-          <p:cNvPr id="17" name="rev_12_caja"/>
+          <p:cNvPr id="23" name="rev_12_caja"/>
           <p:cNvSpPr/>
           <p:nvPr/>
         </p:nvSpPr>
         <p:spPr>
           <a:xfrm>
-            <a:off x="7498080" y="3995928"/>
-            <a:ext cx="4142232" cy="795528"/>
+            <a:off x="6295644" y="5440680"/>
+            <a:ext cx="2416302" cy="640080"/>
           </a:xfrm>
           <a:prstGeom prst="roundRect">
             <a:avLst>
-              <a:gd name="adj" fmla="val 13793"/>
+              <a:gd name="adj" fmla="val 17143"/>
             </a:avLst>
           </a:prstGeom>
           <a:solidFill>
@@ -17104,14 +17349,14 @@
       </p:sp>
       <p:sp>
         <p:nvSpPr>
-          <p:cNvPr id="18" name="rev_12_txt"/>
+          <p:cNvPr id="24" name="rev_12_txt"/>
           <p:cNvSpPr txBox="1"/>
           <p:nvPr/>
         </p:nvSpPr>
         <p:spPr>
           <a:xfrm>
-            <a:off x="7589520" y="3995928"/>
-            <a:ext cx="3959352" cy="795528"/>
+            <a:off x="6323076" y="5440680"/>
+            <a:ext cx="2361438" cy="640080"/>
           </a:xfrm>
           <a:prstGeom prst="rect">
             <a:avLst/>
@@ -17129,7 +17374,7 @@
               <a:buNone/>
             </a:pPr>
             <a:r>
-              <a:rPr lang="ko-KR" altLang="en-US" sz="2200" b="1" dirty="0">
+              <a:rPr lang="ko-KR" altLang="en-US" sz="2000" b="1" dirty="0">
                 <a:solidFill>
                   <a:srgbClr val="FFFFFF"/>
                 </a:solidFill>
@@ -17139,20 +17384,78 @@
               </a:rPr>
               <a:t>제주도</a:t>
             </a:r>
-            <a:endParaRPr lang="en-US" sz="2200" dirty="0"/>
+            <a:endParaRPr lang="en-US" sz="2000" dirty="0"/>
           </a:p>
         </p:txBody>
       </p:sp>
       <p:sp>
         <p:nvSpPr>
-          <p:cNvPr id="19" name="num_3"/>
+          <p:cNvPr id="25" name="card_3"/>
           <p:cNvSpPr/>
           <p:nvPr/>
         </p:nvSpPr>
         <p:spPr>
           <a:xfrm>
-            <a:off x="548640" y="5161788"/>
-            <a:ext cx="457200" cy="457200"/>
+            <a:off x="9004554" y="1965960"/>
+            <a:ext cx="2635758" cy="4206240"/>
+          </a:xfrm>
+          <a:prstGeom prst="roundRect">
+            <a:avLst>
+              <a:gd name="adj" fmla="val 5204"/>
+            </a:avLst>
+          </a:prstGeom>
+          <a:solidFill>
+            <a:srgbClr val="FFFFFF"/>
+          </a:solidFill>
+          <a:ln w="12700">
+            <a:solidFill>
+              <a:srgbClr val="D9D7F7"/>
+            </a:solidFill>
+            <a:prstDash val="solid"/>
+          </a:ln>
+          <a:effectLst>
+            <a:outerShdw blurRad="76200" dist="25400" dir="5400000" algn="bl" rotWithShape="0">
+              <a:srgbClr val="14142B">
+                <a:alpha val="12000"/>
+              </a:srgbClr>
+            </a:outerShdw>
+          </a:effectLst>
+        </p:spPr>
+      </p:sp>
+      <p:pic>
+        <p:nvPicPr>
+          <p:cNvPr id="26" name="item_img_3" descr="C:\Users\Chingu\AppData\Local\Temp\claude\C--Users-Chingu-Desktop-ACADEMIASEULWEB\d4111e1b-5523-44ea-97b2-b1a1d9545b9e\scratchpad\decks\cache\img_f61f3cfb175bff2f.png"/>
+          <p:cNvPicPr>
+            <a:picLocks noChangeAspect="1"/>
+          </p:cNvPicPr>
+          <p:nvPr/>
+        </p:nvPicPr>
+        <p:blipFill>
+          <a:blip r:embed="rId6"/>
+          <a:stretch>
+            <a:fillRect/>
+          </a:stretch>
+        </p:blipFill>
+        <p:spPr>
+          <a:xfrm>
+            <a:off x="9114282" y="2106549"/>
+            <a:ext cx="2416302" cy="2416302"/>
+          </a:xfrm>
+          <a:prstGeom prst="rect">
+            <a:avLst/>
+          </a:prstGeom>
+        </p:spPr>
+      </p:pic>
+      <p:sp>
+        <p:nvSpPr>
+          <p:cNvPr id="27" name="num_3"/>
+          <p:cNvSpPr/>
+          <p:nvPr/>
+        </p:nvSpPr>
+        <p:spPr>
+          <a:xfrm>
+            <a:off x="9095994" y="2057400"/>
+            <a:ext cx="420624" cy="420624"/>
           </a:xfrm>
           <a:prstGeom prst="ellipse">
             <a:avLst/>
@@ -17160,9 +17463,9 @@
           <a:solidFill>
             <a:srgbClr val="003478"/>
           </a:solidFill>
-          <a:ln w="12700">
+          <a:ln w="19050">
             <a:solidFill>
-              <a:srgbClr val="003478"/>
+              <a:srgbClr val="FFFFFF"/>
             </a:solidFill>
             <a:prstDash val="solid"/>
           </a:ln>
@@ -17170,14 +17473,14 @@
       </p:sp>
       <p:sp>
         <p:nvSpPr>
-          <p:cNvPr id="20" name="Text 18"/>
+          <p:cNvPr id="28" name="Text 22"/>
           <p:cNvSpPr txBox="1"/>
           <p:nvPr/>
         </p:nvSpPr>
         <p:spPr>
           <a:xfrm>
-            <a:off x="548640" y="5161788"/>
-            <a:ext cx="457200" cy="457200"/>
+            <a:off x="9095994" y="2057400"/>
+            <a:ext cx="420624" cy="420624"/>
           </a:xfrm>
           <a:prstGeom prst="rect">
             <a:avLst/>
@@ -17195,27 +17498,27 @@
               <a:buNone/>
             </a:pPr>
             <a:r>
-              <a:rPr lang="en-US" sz="1600" b="1" dirty="0">
+              <a:rPr lang="en-US" sz="1500" b="1" dirty="0">
                 <a:solidFill>
                   <a:srgbClr val="FFFFFF"/>
                 </a:solidFill>
               </a:rPr>
               <a:t>4</a:t>
             </a:r>
-            <a:endParaRPr lang="en-US" sz="1600" dirty="0"/>
+            <a:endParaRPr lang="en-US" sz="1500" dirty="0"/>
           </a:p>
         </p:txBody>
       </p:sp>
       <p:sp>
         <p:nvSpPr>
-          <p:cNvPr id="21" name="Text 19"/>
+          <p:cNvPr id="29" name="Text 23"/>
           <p:cNvSpPr txBox="1"/>
           <p:nvPr/>
         </p:nvSpPr>
         <p:spPr>
           <a:xfrm>
-            <a:off x="1188720" y="4956048"/>
-            <a:ext cx="6080760" cy="868680"/>
+            <a:off x="9095994" y="4617720"/>
+            <a:ext cx="2452878" cy="777240"/>
           </a:xfrm>
           <a:prstGeom prst="rect">
             <a:avLst/>
@@ -17229,35 +17532,35 @@
           </a:bodyPr>
           <a:lstStyle/>
           <a:p>
-            <a:pPr marL="0" indent="0" eaLnBrk="1">
+            <a:pPr marL="0" indent="0" algn="ctr" eaLnBrk="1">
               <a:buNone/>
             </a:pPr>
             <a:r>
-              <a:rPr lang="en-US" sz="2400" dirty="0">
+              <a:rPr lang="en-US" sz="2200" dirty="0">
                 <a:solidFill>
                   <a:srgbClr val="14142B"/>
                 </a:solidFill>
               </a:rPr>
               <a:t>Foto 4</a:t>
             </a:r>
-            <a:endParaRPr lang="en-US" sz="2400" dirty="0"/>
+            <a:endParaRPr lang="en-US" sz="2200" dirty="0"/>
           </a:p>
         </p:txBody>
       </p:sp>
       <p:sp>
         <p:nvSpPr>
-          <p:cNvPr id="22" name="rev_13_caja"/>
+          <p:cNvPr id="30" name="rev_13_caja"/>
           <p:cNvSpPr/>
           <p:nvPr/>
         </p:nvSpPr>
         <p:spPr>
           <a:xfrm>
-            <a:off x="7498080" y="4992624"/>
-            <a:ext cx="4142232" cy="795528"/>
+            <a:off x="9114282" y="5440680"/>
+            <a:ext cx="2416302" cy="640080"/>
           </a:xfrm>
           <a:prstGeom prst="roundRect">
             <a:avLst>
-              <a:gd name="adj" fmla="val 13793"/>
+              <a:gd name="adj" fmla="val 17143"/>
             </a:avLst>
           </a:prstGeom>
           <a:solidFill>
@@ -17273,14 +17576,14 @@
       </p:sp>
       <p:sp>
         <p:nvSpPr>
-          <p:cNvPr id="23" name="rev_13_txt"/>
+          <p:cNvPr id="31" name="rev_13_txt"/>
           <p:cNvSpPr txBox="1"/>
           <p:nvPr/>
         </p:nvSpPr>
         <p:spPr>
           <a:xfrm>
-            <a:off x="7589520" y="4992624"/>
-            <a:ext cx="3959352" cy="795528"/>
+            <a:off x="9141714" y="5440680"/>
+            <a:ext cx="2361438" cy="640080"/>
           </a:xfrm>
           <a:prstGeom prst="rect">
             <a:avLst/>
@@ -17298,7 +17601,7 @@
               <a:buNone/>
             </a:pPr>
             <a:r>
-              <a:rPr lang="ko-KR" altLang="en-US" sz="2200" b="1" dirty="0">
+              <a:rPr lang="ko-KR" altLang="en-US" sz="2000" b="1" dirty="0">
                 <a:solidFill>
                   <a:srgbClr val="FFFFFF"/>
                 </a:solidFill>
@@ -17309,20 +17612,20 @@
               <a:t>일본 </a:t>
             </a:r>
             <a:r>
-              <a:rPr lang="en-US" sz="2200" b="1" dirty="0">
+              <a:rPr lang="en-US" sz="2000" b="1" dirty="0">
                 <a:solidFill>
                   <a:srgbClr val="FFFFFF"/>
                 </a:solidFill>
               </a:rPr>
               <a:t>(Tokio)</a:t>
             </a:r>
-            <a:endParaRPr lang="en-US" sz="2200" dirty="0"/>
+            <a:endParaRPr lang="en-US" sz="2000" dirty="0"/>
           </a:p>
         </p:txBody>
       </p:sp>
       <p:sp>
         <p:nvSpPr>
-          <p:cNvPr id="25" name="Slide Number Placeholder 0"/>
+          <p:cNvPr id="32" name="Slide Number Placeholder 0"/>
           <p:cNvSpPr>
             <a:spLocks noGrp="1"/>
           </p:cNvSpPr>
@@ -17407,7 +17710,7 @@
                                           </p:stCondLst>
                                         </p:cTn>
                                         <p:tgtEl>
-                                          <p:spTgt spid="7"/>
+                                          <p:spTgt spid="9"/>
                                         </p:tgtEl>
                                         <p:attrNameLst>
                                           <p:attrName>style.visibility</p:attrName>
@@ -17434,7 +17737,7 @@
                                           </p:stCondLst>
                                         </p:cTn>
                                         <p:tgtEl>
-                                          <p:spTgt spid="8"/>
+                                          <p:spTgt spid="10"/>
                                         </p:tgtEl>
                                         <p:attrNameLst>
                                           <p:attrName>style.visibility</p:attrName>
@@ -17479,7 +17782,7 @@
                                           </p:stCondLst>
                                         </p:cTn>
                                         <p:tgtEl>
-                                          <p:spTgt spid="12"/>
+                                          <p:spTgt spid="16"/>
                                         </p:tgtEl>
                                         <p:attrNameLst>
                                           <p:attrName>style.visibility</p:attrName>
@@ -17506,7 +17809,7 @@
                                           </p:stCondLst>
                                         </p:cTn>
                                         <p:tgtEl>
-                                          <p:spTgt spid="13"/>
+                                          <p:spTgt spid="17"/>
                                         </p:tgtEl>
                                         <p:attrNameLst>
                                           <p:attrName>style.visibility</p:attrName>
@@ -17551,7 +17854,7 @@
                                           </p:stCondLst>
                                         </p:cTn>
                                         <p:tgtEl>
-                                          <p:spTgt spid="17"/>
+                                          <p:spTgt spid="23"/>
                                         </p:tgtEl>
                                         <p:attrNameLst>
                                           <p:attrName>style.visibility</p:attrName>
@@ -17578,7 +17881,7 @@
                                           </p:stCondLst>
                                         </p:cTn>
                                         <p:tgtEl>
-                                          <p:spTgt spid="18"/>
+                                          <p:spTgt spid="24"/>
                                         </p:tgtEl>
                                         <p:attrNameLst>
                                           <p:attrName>style.visibility</p:attrName>
@@ -17623,7 +17926,7 @@
                                           </p:stCondLst>
                                         </p:cTn>
                                         <p:tgtEl>
-                                          <p:spTgt spid="22"/>
+                                          <p:spTgt spid="30"/>
                                         </p:tgtEl>
                                         <p:attrNameLst>
                                           <p:attrName>style.visibility</p:attrName>
@@ -17650,7 +17953,7 @@
                                           </p:stCondLst>
                                         </p:cTn>
                                         <p:tgtEl>
-                                          <p:spTgt spid="23"/>
+                                          <p:spTgt spid="31"/>
                                         </p:tgtEl>
                                         <p:attrNameLst>
                                           <p:attrName>style.visibility</p:attrName>
@@ -17691,10 +17994,10 @@
       </p:par>
     </p:tnLst>
     <p:bldLst>
-      <p:bldP spid="8" grpId="0" animBg="1"/>
-      <p:bldP spid="13" grpId="0" animBg="1"/>
-      <p:bldP spid="18" grpId="0" animBg="1"/>
-      <p:bldP spid="23" grpId="0" animBg="1"/>
+      <p:bldP spid="10" grpId="0" animBg="1"/>
+      <p:bldP spid="17" grpId="0" animBg="1"/>
+      <p:bldP spid="24" grpId="0" animBg="1"/>
+      <p:bldP spid="31" grpId="0" animBg="1"/>
     </p:bldLst>
   </p:timing>
 </p:sld>
@@ -17793,7 +18096,7 @@
         <p:spPr>
           <a:xfrm>
             <a:off x="548640" y="1325880"/>
-            <a:ext cx="11064240" cy="548640"/>
+            <a:ext cx="11091672" cy="548640"/>
           </a:xfrm>
           <a:prstGeom prst="rect">
             <a:avLst/>
@@ -18340,7 +18643,7 @@
               <a:buNone/>
             </a:pPr>
             <a:r>
-              <a:rPr lang="ko-KR" altLang="en-US" sz="2400" dirty="0">
+              <a:rPr lang="ko-KR" altLang="en-US" sz="2300" dirty="0">
                 <a:solidFill>
                   <a:srgbClr val="14142B"/>
                 </a:solidFill>
@@ -18351,7 +18654,7 @@
               <a:t>작년에는 대학생</a:t>
             </a:r>
             <a:r>
-              <a:rPr lang="en-US" sz="2400" dirty="0">
+              <a:rPr lang="en-US" sz="2300" dirty="0">
                 <a:solidFill>
                   <a:srgbClr val="14142B"/>
                 </a:solidFill>
@@ -18359,7 +18662,7 @@
               <a:t>______. </a:t>
             </a:r>
             <a:r>
-              <a:rPr lang="ko-KR" altLang="en-US" sz="2400" dirty="0">
+              <a:rPr lang="ko-KR" altLang="en-US" sz="2300" dirty="0">
                 <a:solidFill>
                   <a:srgbClr val="14142B"/>
                 </a:solidFill>
@@ -18370,14 +18673,14 @@
               <a:t>지금은 회사원이에요</a:t>
             </a:r>
             <a:r>
-              <a:rPr lang="en-US" sz="2400" dirty="0">
+              <a:rPr lang="en-US" sz="2300" dirty="0">
                 <a:solidFill>
                   <a:srgbClr val="14142B"/>
                 </a:solidFill>
               </a:rPr>
               <a:t>.</a:t>
             </a:r>
-            <a:endParaRPr lang="en-US" sz="2400" dirty="0"/>
+            <a:endParaRPr lang="en-US" sz="2300" dirty="0"/>
           </a:p>
         </p:txBody>
       </p:sp>
@@ -18547,7 +18850,7 @@
                 <a:ea typeface="Malgun Gothic" pitchFamily="34" charset="-122"/>
                 <a:cs typeface="Malgun Gothic" pitchFamily="34" charset="-120"/>
               </a:rPr>
-              <a:t>아홉 시</a:t>
+              <a:t>아홉 시</a:t>
             </a:r>
             <a:r>
               <a:rPr lang="en-US" sz="2400" dirty="0">
@@ -18566,7 +18869,7 @@
                 <a:ea typeface="Malgun Gothic" pitchFamily="34" charset="-122"/>
                 <a:cs typeface="Malgun Gothic" pitchFamily="34" charset="-120"/>
               </a:rPr>
-              <a:t>여섯 시</a:t>
+              <a:t>여섯 시</a:t>
             </a:r>
             <a:r>
               <a:rPr lang="en-US" sz="2400" dirty="0">
@@ -18776,7 +19079,7 @@
               <a:buNone/>
             </a:pPr>
             <a:r>
-              <a:rPr lang="ko-KR" altLang="en-US" sz="1600" dirty="0">
+              <a:rPr lang="ko-KR" altLang="en-US" sz="1200" dirty="0">
                 <a:solidFill>
                   <a:srgbClr val="14142B"/>
                 </a:solidFill>
@@ -18787,7 +19090,7 @@
               <a:t>다음을 읽고 내용과 같은 것을 고르십시오</a:t>
             </a:r>
             <a:r>
-              <a:rPr lang="en-US" sz="1600" dirty="0">
+              <a:rPr lang="en-US" sz="1200" dirty="0">
                 <a:solidFill>
                   <a:srgbClr val="14142B"/>
                 </a:solidFill>
@@ -18795,7 +19098,7 @@
               <a:t>. 「</a:t>
             </a:r>
             <a:r>
-              <a:rPr lang="ko-KR" altLang="en-US" sz="1600" dirty="0">
+              <a:rPr lang="ko-KR" altLang="en-US" sz="1200" dirty="0">
                 <a:solidFill>
                   <a:srgbClr val="14142B"/>
                 </a:solidFill>
@@ -18806,7 +19109,7 @@
               <a:t>지난 토요일에 친구하고 공원에 갔어요</a:t>
             </a:r>
             <a:r>
-              <a:rPr lang="en-US" sz="1600" dirty="0">
+              <a:rPr lang="en-US" sz="1200" dirty="0">
                 <a:solidFill>
                   <a:srgbClr val="14142B"/>
                 </a:solidFill>
@@ -18814,7 +19117,7 @@
               <a:t>. </a:t>
             </a:r>
             <a:r>
-              <a:rPr lang="ko-KR" altLang="en-US" sz="1600" dirty="0">
+              <a:rPr lang="ko-KR" altLang="en-US" sz="1200" dirty="0">
                 <a:solidFill>
                   <a:srgbClr val="14142B"/>
                 </a:solidFill>
@@ -18825,7 +19128,7 @@
               <a:t>공원에서 같이 운동했어요</a:t>
             </a:r>
             <a:r>
-              <a:rPr lang="en-US" sz="1600" dirty="0">
+              <a:rPr lang="en-US" sz="1200" dirty="0">
                 <a:solidFill>
                   <a:srgbClr val="14142B"/>
                 </a:solidFill>
@@ -18833,7 +19136,7 @@
               <a:t>. </a:t>
             </a:r>
             <a:r>
-              <a:rPr lang="ko-KR" altLang="en-US" sz="1600" dirty="0">
+              <a:rPr lang="ko-KR" altLang="en-US" sz="1200" dirty="0">
                 <a:solidFill>
                   <a:srgbClr val="14142B"/>
                 </a:solidFill>
@@ -18844,7 +19147,7 @@
               <a:t>그리고 카페에서 커피를 마셨어요</a:t>
             </a:r>
             <a:r>
-              <a:rPr lang="en-US" sz="1600" dirty="0">
+              <a:rPr lang="en-US" sz="1200" dirty="0">
                 <a:solidFill>
                   <a:srgbClr val="14142B"/>
                 </a:solidFill>
@@ -18852,7 +19155,7 @@
               <a:t>. </a:t>
             </a:r>
             <a:r>
-              <a:rPr lang="ko-KR" altLang="en-US" sz="1600" dirty="0">
+              <a:rPr lang="ko-KR" altLang="en-US" sz="1200" dirty="0">
                 <a:solidFill>
                   <a:srgbClr val="14142B"/>
                 </a:solidFill>
@@ -18863,7 +19166,7 @@
               <a:t>일요일에는 집에서 쉬었어요</a:t>
             </a:r>
             <a:r>
-              <a:rPr lang="en-US" sz="1600" dirty="0">
+              <a:rPr lang="en-US" sz="1200" dirty="0">
                 <a:solidFill>
                   <a:srgbClr val="14142B"/>
                 </a:solidFill>
@@ -18871,7 +19174,7 @@
               <a:t>.」 ① </a:t>
             </a:r>
             <a:r>
-              <a:rPr lang="ko-KR" altLang="en-US" sz="1600" dirty="0">
+              <a:rPr lang="ko-KR" altLang="en-US" sz="1200" dirty="0">
                 <a:solidFill>
                   <a:srgbClr val="14142B"/>
                 </a:solidFill>
@@ -18882,7 +19185,7 @@
               <a:t>토요일에 혼자 공원에 갔어요</a:t>
             </a:r>
             <a:r>
-              <a:rPr lang="en-US" sz="1600" dirty="0">
+              <a:rPr lang="en-US" sz="1200" dirty="0">
                 <a:solidFill>
                   <a:srgbClr val="14142B"/>
                 </a:solidFill>
@@ -18890,7 +19193,7 @@
               <a:t>. ② </a:t>
             </a:r>
             <a:r>
-              <a:rPr lang="ko-KR" altLang="en-US" sz="1600" dirty="0">
+              <a:rPr lang="ko-KR" altLang="en-US" sz="1200" dirty="0">
                 <a:solidFill>
                   <a:srgbClr val="14142B"/>
                 </a:solidFill>
@@ -18901,7 +19204,7 @@
               <a:t>공원에서 커피를 마셨어요</a:t>
             </a:r>
             <a:r>
-              <a:rPr lang="en-US" sz="1600" dirty="0">
+              <a:rPr lang="en-US" sz="1200" dirty="0">
                 <a:solidFill>
                   <a:srgbClr val="14142B"/>
                 </a:solidFill>
@@ -18909,7 +19212,7 @@
               <a:t>. ③ </a:t>
             </a:r>
             <a:r>
-              <a:rPr lang="ko-KR" altLang="en-US" sz="1600" dirty="0">
+              <a:rPr lang="ko-KR" altLang="en-US" sz="1200" dirty="0">
                 <a:solidFill>
                   <a:srgbClr val="14142B"/>
                 </a:solidFill>
@@ -18920,7 +19223,7 @@
               <a:t>친구하고 운동했어요</a:t>
             </a:r>
             <a:r>
-              <a:rPr lang="en-US" sz="1600" dirty="0">
+              <a:rPr lang="en-US" sz="1200" dirty="0">
                 <a:solidFill>
                   <a:srgbClr val="14142B"/>
                 </a:solidFill>
@@ -18928,7 +19231,7 @@
               <a:t>. ④ </a:t>
             </a:r>
             <a:r>
-              <a:rPr lang="ko-KR" altLang="en-US" sz="1600" dirty="0">
+              <a:rPr lang="ko-KR" altLang="en-US" sz="1200" dirty="0">
                 <a:solidFill>
                   <a:srgbClr val="14142B"/>
                 </a:solidFill>
@@ -18939,14 +19242,14 @@
               <a:t>일요일에 카페에 갔어요</a:t>
             </a:r>
             <a:r>
-              <a:rPr lang="en-US" sz="1600" dirty="0">
+              <a:rPr lang="en-US" sz="1200" dirty="0">
                 <a:solidFill>
                   <a:srgbClr val="14142B"/>
                 </a:solidFill>
               </a:rPr>
               <a:t>.</a:t>
             </a:r>
-            <a:endParaRPr lang="en-US" sz="1600" dirty="0"/>
+            <a:endParaRPr lang="en-US" sz="1200" dirty="0"/>
           </a:p>
         </p:txBody>
       </p:sp>
@@ -19553,7 +19856,7 @@
         <p:spPr>
           <a:xfrm>
             <a:off x="548640" y="1325880"/>
-            <a:ext cx="11064240" cy="457200"/>
+            <a:ext cx="11091672" cy="457200"/>
           </a:xfrm>
           <a:prstGeom prst="rect">
             <a:avLst/>
@@ -19591,7 +19894,7 @@
           <p:nvPr>
             <p:extLst>
               <p:ext uri="{D42A27DB-BD31-4B8C-83A1-F6EECF244321}">
-                <p14:modId xmlns:p14="http://schemas.microsoft.com/office/powerpoint/2010/main" val="3067926358"/>
+                <p14:modId xmlns:p14="http://schemas.microsoft.com/office/powerpoint/2010/main" val="3213157026"/>
               </p:ext>
             </p:extLst>
           </p:nvPr>
@@ -20423,7 +20726,7 @@
           <p:nvPr>
             <p:extLst>
               <p:ext uri="{D42A27DB-BD31-4B8C-83A1-F6EECF244321}">
-                <p14:modId xmlns:p14="http://schemas.microsoft.com/office/powerpoint/2010/main" val="1145359088"/>
+                <p14:modId xmlns:p14="http://schemas.microsoft.com/office/powerpoint/2010/main" val="209631388"/>
               </p:ext>
             </p:extLst>
           </p:nvPr>
@@ -21483,7 +21786,7 @@
         <p:spPr>
           <a:xfrm>
             <a:off x="548640" y="1325880"/>
-            <a:ext cx="6949440" cy="4846320"/>
+            <a:ext cx="5669280" cy="4846320"/>
           </a:xfrm>
           <a:prstGeom prst="rect">
             <a:avLst/>
@@ -21680,12 +21983,12 @@
         </p:nvSpPr>
         <p:spPr>
           <a:xfrm>
-            <a:off x="8001000" y="1417320"/>
-            <a:ext cx="3611880" cy="4480560"/>
+            <a:off x="6446520" y="1371600"/>
+            <a:ext cx="5193792" cy="4800600"/>
           </a:xfrm>
           <a:prstGeom prst="roundRect">
             <a:avLst>
-              <a:gd name="adj" fmla="val 6329"/>
+              <a:gd name="adj" fmla="val 4762"/>
             </a:avLst>
           </a:prstGeom>
           <a:solidFill>
@@ -21699,47 +22002,30 @@
           </a:ln>
         </p:spPr>
       </p:sp>
-      <p:sp>
-        <p:nvSpPr>
-          <p:cNvPr id="5" name="ko_grande"/>
-          <p:cNvSpPr txBox="1"/>
+      <p:pic>
+        <p:nvPicPr>
+          <p:cNvPr id="5" name="imagen" descr="C:\Users\Chingu\AppData\Local\Temp\claude\C--Users-Chingu-Desktop-ACADEMIASEULWEB\d4111e1b-5523-44ea-97b2-b1a1d9545b9e\scratchpad\decks\cache\img_74e0b5c8077b47c3.png"/>
+          <p:cNvPicPr>
+            <a:picLocks noChangeAspect="1"/>
+          </p:cNvPicPr>
           <p:nvPr/>
-        </p:nvSpPr>
-        <p:spPr>
-          <a:xfrm>
-            <a:off x="8092440" y="1874520"/>
-            <a:ext cx="3429000" cy="2926080"/>
+        </p:nvPicPr>
+        <p:blipFill>
+          <a:blip r:embed="rId3"/>
+          <a:stretch>
+            <a:fillRect/>
+          </a:stretch>
+        </p:blipFill>
+        <p:spPr>
+          <a:xfrm>
+            <a:off x="7040833" y="1463040"/>
+            <a:ext cx="4005165" cy="4617720"/>
           </a:xfrm>
           <a:prstGeom prst="rect">
             <a:avLst/>
           </a:prstGeom>
-          <a:noFill/>
-          <a:ln/>
-        </p:spPr>
-        <p:txBody>
-          <a:bodyPr wrap="square" lIns="0" tIns="0" rIns="0" bIns="0" rtlCol="0" anchor="ctr">
-            <a:normAutofit/>
-          </a:bodyPr>
-          <a:lstStyle/>
-          <a:p>
-            <a:pPr marL="0" indent="0" algn="ctr" eaLnBrk="1">
-              <a:buNone/>
-            </a:pPr>
-            <a:r>
-              <a:rPr lang="ko-KR" altLang="en-US" sz="7000" b="1" dirty="0">
-                <a:solidFill>
-                  <a:srgbClr val="4236F6"/>
-                </a:solidFill>
-                <a:latin typeface="Malgun Gothic" pitchFamily="34" charset="0"/>
-                <a:ea typeface="Malgun Gothic" pitchFamily="34" charset="-122"/>
-                <a:cs typeface="Malgun Gothic" pitchFamily="34" charset="-120"/>
-              </a:rPr>
-              <a:t>제 계획</a:t>
-            </a:r>
-            <a:endParaRPr lang="en-US" sz="7000" dirty="0"/>
-          </a:p>
-        </p:txBody>
-      </p:sp>
+        </p:spPr>
+      </p:pic>
       <p:sp>
         <p:nvSpPr>
           <p:cNvPr id="25" name="Slide Number Placeholder 0"/>
@@ -21900,7 +22186,7 @@
         <p:spPr>
           <a:xfrm>
             <a:off x="548640" y="1325880"/>
-            <a:ext cx="11064240" cy="457200"/>
+            <a:ext cx="11091672" cy="457200"/>
           </a:xfrm>
           <a:prstGeom prst="rect">
             <a:avLst/>
@@ -21941,7 +22227,7 @@
           <p:nvPr>
             <p:extLst>
               <p:ext uri="{D42A27DB-BD31-4B8C-83A1-F6EECF244321}">
-                <p14:modId xmlns:p14="http://schemas.microsoft.com/office/powerpoint/2010/main" val="727712061"/>
+                <p14:modId xmlns:p14="http://schemas.microsoft.com/office/powerpoint/2010/main" val="1966717791"/>
               </p:ext>
             </p:extLst>
           </p:nvPr>
@@ -23430,7 +23716,7 @@
         <p:spPr>
           <a:xfrm>
             <a:off x="548640" y="1325880"/>
-            <a:ext cx="11064240" cy="457200"/>
+            <a:ext cx="11091672" cy="457200"/>
           </a:xfrm>
           <a:prstGeom prst="rect">
             <a:avLst/>
@@ -24397,7 +24683,7 @@
         <p:spPr>
           <a:xfrm>
             <a:off x="548640" y="1325880"/>
-            <a:ext cx="11064240" cy="457200"/>
+            <a:ext cx="11091672" cy="457200"/>
           </a:xfrm>
           <a:prstGeom prst="rect">
             <a:avLst/>
@@ -24560,7 +24846,7 @@
           <p:nvPr>
             <p:extLst>
               <p:ext uri="{D42A27DB-BD31-4B8C-83A1-F6EECF244321}">
-                <p14:modId xmlns:p14="http://schemas.microsoft.com/office/powerpoint/2010/main" val="348715104"/>
+                <p14:modId xmlns:p14="http://schemas.microsoft.com/office/powerpoint/2010/main" val="3327640781"/>
               </p:ext>
             </p:extLst>
           </p:nvPr>

--- a/Curriculo/Fase3_Basico2/decks/Basico2_S05_Jay.pptx
+++ b/Curriculo/Fase3_Basico2/decks/Basico2_S05_Jay.pptx
@@ -134,7 +134,7 @@
   <p:extLst>
     <p:ext uri="{521415D9-36F7-43E2-AB2F-B90AF26B5E84}">
       <p14:sectionLst xmlns:p14="http://schemas.microsoft.com/office/powerpoint/2010/main">
-        <p14:section name="Semana 5" id="{7E0E0128-3014-1CAE-AB02-0E028560F193}">
+        <p14:section name="Semana 5" id="{A4D5CA22-CA54-DB2F-C680-043EC67F5BF3}">
           <p14:sldIdLst>
             <p14:sldId id="256"/>
             <p14:sldId id="257"/>
@@ -200,7 +200,7 @@
     </p:spTree>
     <p:extLst>
       <p:ext uri="{BB962C8B-B14F-4D97-AF65-F5344CB8AC3E}">
-        <p14:creationId xmlns:p14="http://schemas.microsoft.com/office/powerpoint/2010/main" val="1993343724"/>
+        <p14:creationId xmlns:p14="http://schemas.microsoft.com/office/powerpoint/2010/main" val="612370080"/>
       </p:ext>
     </p:extLst>
   </p:cSld>
@@ -1327,7 +1327,7 @@
           <a:p>
             <a:r>
               <a:rPr lang="en-US" dirty="0"/>
-              <a:t>21:00–21:01 · 1 min. Inicia la grabación en la nube desde aquí (Basico2_S05_2026-11-11) y saluda: «안녕하세요, 여러분!». En Chile es miércoles 11, pero en Corea ya es jueves 12 a las 9:00: el 11/11 fue ayer. 따라 하세요: «빼빼로데이였어요» (coro). En 30 s: galletita en forma de palito, 11/11 parecen cuatro palitos, fecha comercial popular desde los años 90, no fiesta tradicional; y fíjense en 였어요, el pasado de la semana pasada, último viaje al pasado antes del quiz 4.
+              <a:t>21:00–21:01 · 1 min. Inicia la grabación en la nube desde aquí (Basico2_S05_2026-11-18) y saluda: «안녕하세요, 여러분!». En Chile es miércoles 18 y en Corea ya es jueves 19 a las 9:00; el 11/11 fue el miércoles pasado: 지난주 수요일은 빼빼로데이였어요. 따라 하세요: «빼빼로데이였어요» (coro). En 30 s: galletita en forma de palito, 11/11 parecen cuatro palitos, fecha comercial popular desde los años 90, no fiesta tradicional; y fíjense en 였어요, el pasado de la semana pasada, último viaje al pasado antes del quiz 4. Si alguien menciona el 수능: hoy, a esta misma hora, en Corea se está rindiendo; «lo vemos la próxima semana» (no lo desarrolles: es el gancho de la S6).
 Imagen: incluida (dibujo de la casa).
 Fuente: Nueva
 Lámina 1</a:t>
@@ -2309,7 +2309,7 @@
           <a:p>
             <a:r>
               <a:rPr lang="en-US" dirty="0"/>
-              <a:t>45 s · termina a las 21:05 en punto. «Tres cosas que vi en sus hojas 4»: lees las frases ya corregidas y el grupo repite la buena (따라 하세요). Estas cuatro son las de respaldo de la clave del quiz 4: deja 3, o reemplázalas por los 3 errores más repetidos de las Hojas 4 (revísalas el lun 9 o mar 10 nov). Nunca en rojo: lo incorrecto va tachado en gris.
+              <a:t>45 s · termina a las 21:05 en punto. «Tres cosas que vi en sus hojas 4»: lees las frases ya corregidas y el grupo repite la buena (따라 하세요). Estas cuatro son las de respaldo de la clave del quiz 4: deja 3, o reemplázalas por los 3 errores más repetidos de las Hojas 4 (revísalas el lun 16 o mar 17 nov). Nunca en rojo: lo incorrecto va tachado en gris.
 Fuente: Nueva
 Lámina 3</a:t>
             </a:r>
@@ -3879,7 +3879,7 @@
                   <a:srgbClr val="E8B84B"/>
                 </a:solidFill>
               </a:rPr>
-              <a:t>Miércoles 11 de noviembre de 2026 · 21:00 (hora de Chile)</a:t>
+              <a:t>Miércoles 18 de noviembre de 2026 · 21:00 (hora de Chile)</a:t>
             </a:r>
             <a:endParaRPr lang="en-US" sz="2200" dirty="0"/>
           </a:p>
@@ -6510,7 +6510,7 @@
           <p:nvPr>
             <p:extLst>
               <p:ext uri="{D42A27DB-BD31-4B8C-83A1-F6EECF244321}">
-                <p14:modId xmlns:p14="http://schemas.microsoft.com/office/powerpoint/2010/main" val="3741317530"/>
+                <p14:modId xmlns:p14="http://schemas.microsoft.com/office/powerpoint/2010/main" val="2025454959"/>
               </p:ext>
             </p:extLst>
           </p:nvPr>
@@ -10750,7 +10750,7 @@
           <p:nvPr>
             <p:extLst>
               <p:ext uri="{D42A27DB-BD31-4B8C-83A1-F6EECF244321}">
-                <p14:modId xmlns:p14="http://schemas.microsoft.com/office/powerpoint/2010/main" val="363664753"/>
+                <p14:modId xmlns:p14="http://schemas.microsoft.com/office/powerpoint/2010/main" val="2626671781"/>
               </p:ext>
             </p:extLst>
           </p:nvPr>
@@ -12803,24 +12803,21 @@
             <a:r>
               <a:rPr lang="ko-KR" altLang="en-US" sz="2200" b="1" dirty="0">
                 <a:solidFill>
-                  <a:srgbClr val="4236F6"/>
+                  <a:srgbClr val="003478"/>
                 </a:solidFill>
                 <a:latin typeface="Malgun Gothic" pitchFamily="34" charset="0"/>
                 <a:ea typeface="Malgun Gothic" pitchFamily="34" charset="-122"/>
                 <a:cs typeface="Malgun Gothic" pitchFamily="34" charset="-120"/>
               </a:rPr>
-              <a:t>어제 한국은 빼빼로데이였어요  </a:t>
-            </a:r>
-            <a:r>
-              <a:rPr lang="ko-KR" altLang="en-US" sz="2200" b="1" dirty="0">
-                <a:solidFill>
-                  <a:srgbClr val="003478"/>
-                </a:solidFill>
-                <a:latin typeface="Malgun Gothic" pitchFamily="34" charset="0"/>
-                <a:ea typeface="Malgun Gothic" pitchFamily="34" charset="-122"/>
-                <a:cs typeface="Malgun Gothic" pitchFamily="34" charset="-120"/>
-              </a:rPr>
-              <a:t>Ayer en Corea fue 빼빼로데이</a:t>
+              <a:t>El miércoles pasado fue 빼빼로데이</a:t>
+            </a:r>
+            <a:r>
+              <a:rPr lang="en-US" sz="1500" b="1" i="1" dirty="0">
+                <a:solidFill>
+                  <a:srgbClr val="8A8DA0"/>
+                </a:solidFill>
+              </a:rPr>
+              <a:t>   Last Wednesday was Pepero Day in Korea</a:t>
             </a:r>
             <a:endParaRPr lang="en-US" sz="3000" dirty="0"/>
           </a:p>
@@ -12912,7 +12909,7 @@
                 <a:ea typeface="Malgun Gothic" pitchFamily="34" charset="-122"/>
                 <a:cs typeface="Malgun Gothic" pitchFamily="34" charset="-120"/>
               </a:rPr>
-              <a:t>어제 한국은</a:t>
+              <a:t>지난주 수요일은</a:t>
             </a:r>
             <a:endParaRPr lang="en-US" sz="5400" dirty="0"/>
           </a:p>
@@ -12989,7 +12986,7 @@
                 <a:ea typeface="Malgun Gothic" pitchFamily="34" charset="-122"/>
                 <a:cs typeface="Malgun Gothic" pitchFamily="34" charset="-120"/>
               </a:rPr>
-              <a:t>Ayer en Corea fue el día del 빼빼로 </a:t>
+              <a:t>El miércoles pasado (11/11) fue el día del 빼빼로</a:t>
             </a:r>
             <a:r>
               <a:rPr lang="en-US" sz="2400" dirty="0">
@@ -12997,7 +12994,7 @@
                   <a:srgbClr val="5C5F6B"/>
                 </a:solidFill>
               </a:rPr>
-              <a:t>(11/11).</a:t>
+              <a:t>.</a:t>
             </a:r>
             <a:endParaRPr lang="en-US" sz="2400" dirty="0"/>
           </a:p>
@@ -13034,12 +13031,34 @@
               <a:buChar char="•"/>
             </a:pPr>
             <a:r>
+              <a:rPr lang="ko-KR" altLang="en-US" sz="1800" dirty="0">
+                <a:solidFill>
+                  <a:srgbClr val="14142B"/>
+                </a:solidFill>
+                <a:latin typeface="Malgun Gothic" pitchFamily="34" charset="0"/>
+                <a:ea typeface="Malgun Gothic" pitchFamily="34" charset="-122"/>
+                <a:cs typeface="Malgun Gothic" pitchFamily="34" charset="-120"/>
+              </a:rPr>
+              <a:t>지난주 수요일은 빼빼로데이였어요 </a:t>
+            </a:r>
+            <a:r>
               <a:rPr lang="en-US" sz="1800" dirty="0">
                 <a:solidFill>
                   <a:srgbClr val="14142B"/>
                 </a:solidFill>
               </a:rPr>
-              <a:t>Chile: miércoles 11 · Corea: jueves 12, 09:00 · 11/11</a:t>
+              <a:t>· 11/11 = </a:t>
+            </a:r>
+            <a:r>
+              <a:rPr lang="ko-KR" altLang="en-US" sz="1800" dirty="0">
+                <a:solidFill>
+                  <a:srgbClr val="14142B"/>
+                </a:solidFill>
+                <a:latin typeface="Malgun Gothic" pitchFamily="34" charset="0"/>
+                <a:ea typeface="Malgun Gothic" pitchFamily="34" charset="-122"/>
+                <a:cs typeface="Malgun Gothic" pitchFamily="34" charset="-120"/>
+              </a:rPr>
+              <a:t>지난주 수요일</a:t>
             </a:r>
             <a:endParaRPr lang="en-US" sz="1800" dirty="0"/>
           </a:p>
@@ -15974,7 +15993,7 @@
                   <a:srgbClr val="003478"/>
                 </a:solidFill>
               </a:rPr>
-              <a:t>Tarea · ≈ 30 min · antes del mié 18, 21:00</a:t>
+              <a:t>Tarea · ≈ 30 min · antes del mié 25, 21:00</a:t>
             </a:r>
             <a:r>
               <a:rPr lang="en-US" sz="1500" b="1" i="1" dirty="0">
@@ -16503,7 +16522,7 @@
                   <a:srgbClr val="FFFFFF"/>
                 </a:solidFill>
               </a:rPr>
-              <a:t>Clase 6: miércoles 18 de noviembre, 21:00 (hora de Chile)</a:t>
+              <a:t>Clase 6: miércoles 25 de noviembre, 21:00 (hora de Chile)</a:t>
             </a:r>
             <a:endParaRPr lang="en-US" sz="2200" dirty="0"/>
           </a:p>
@@ -19894,7 +19913,7 @@
           <p:nvPr>
             <p:extLst>
               <p:ext uri="{D42A27DB-BD31-4B8C-83A1-F6EECF244321}">
-                <p14:modId xmlns:p14="http://schemas.microsoft.com/office/powerpoint/2010/main" val="3213157026"/>
+                <p14:modId xmlns:p14="http://schemas.microsoft.com/office/powerpoint/2010/main" val="1682993733"/>
               </p:ext>
             </p:extLst>
           </p:nvPr>
@@ -20726,7 +20745,7 @@
           <p:nvPr>
             <p:extLst>
               <p:ext uri="{D42A27DB-BD31-4B8C-83A1-F6EECF244321}">
-                <p14:modId xmlns:p14="http://schemas.microsoft.com/office/powerpoint/2010/main" val="209631388"/>
+                <p14:modId xmlns:p14="http://schemas.microsoft.com/office/powerpoint/2010/main" val="626402824"/>
               </p:ext>
             </p:extLst>
           </p:nvPr>
@@ -22227,7 +22246,7 @@
           <p:nvPr>
             <p:extLst>
               <p:ext uri="{D42A27DB-BD31-4B8C-83A1-F6EECF244321}">
-                <p14:modId xmlns:p14="http://schemas.microsoft.com/office/powerpoint/2010/main" val="1966717791"/>
+                <p14:modId xmlns:p14="http://schemas.microsoft.com/office/powerpoint/2010/main" val="1417706872"/>
               </p:ext>
             </p:extLst>
           </p:nvPr>
@@ -24846,7 +24865,7 @@
           <p:nvPr>
             <p:extLst>
               <p:ext uri="{D42A27DB-BD31-4B8C-83A1-F6EECF244321}">
-                <p14:modId xmlns:p14="http://schemas.microsoft.com/office/powerpoint/2010/main" val="3327640781"/>
+                <p14:modId xmlns:p14="http://schemas.microsoft.com/office/powerpoint/2010/main" val="2640862295"/>
               </p:ext>
             </p:extLst>
           </p:nvPr>
